--- a/mega2_doc/Posters/ASHG_2017/Mega2R_poster_2017.pptx
+++ b/mega2_doc/Posters/ASHG_2017/Mega2R_poster_2017.pptx
@@ -3544,7 +3544,7 @@
   </dgm:whole>
   <dgm:extLst>
     <a:ext uri="http://schemas.microsoft.com/office/drawing/2008/diagram">
-      <dsp:dataModelExt xmlns:dsp="http://schemas.microsoft.com/office/drawing/2008/diagram" relId="rId11" minVer="http://schemas.openxmlformats.org/drawingml/2006/diagram"/>
+      <dsp:dataModelExt xmlns:dsp="http://schemas.microsoft.com/office/drawing/2008/diagram" relId="rId9" minVer="http://schemas.openxmlformats.org/drawingml/2006/diagram"/>
     </a:ext>
   </dgm:extLst>
 </dgm:dataModel>
@@ -3846,7 +3846,7 @@
   <dgm:whole/>
   <dgm:extLst>
     <a:ext uri="http://schemas.microsoft.com/office/drawing/2008/diagram">
-      <dsp:dataModelExt xmlns:dsp="http://schemas.microsoft.com/office/drawing/2008/diagram" relId="rId16" minVer="http://schemas.openxmlformats.org/drawingml/2006/diagram"/>
+      <dsp:dataModelExt xmlns:dsp="http://schemas.microsoft.com/office/drawing/2008/diagram" relId="rId14" minVer="http://schemas.openxmlformats.org/drawingml/2006/diagram"/>
     </a:ext>
   </dgm:extLst>
 </dgm:dataModel>
@@ -4124,7 +4124,7 @@
   <dgm:whole/>
   <dgm:extLst>
     <a:ext uri="http://schemas.microsoft.com/office/drawing/2008/diagram">
-      <dsp:dataModelExt xmlns:dsp="http://schemas.microsoft.com/office/drawing/2008/diagram" relId="rId21" minVer="http://schemas.openxmlformats.org/drawingml/2006/diagram"/>
+      <dsp:dataModelExt xmlns:dsp="http://schemas.microsoft.com/office/drawing/2008/diagram" relId="rId19" minVer="http://schemas.openxmlformats.org/drawingml/2006/diagram"/>
     </a:ext>
   </dgm:extLst>
 </dgm:dataModel>
@@ -4219,8 +4219,16 @@
         <a:lstStyle/>
         <a:p>
           <a:r>
+            <a:rPr lang="en-US" dirty="0" smtClean="0">
+              <a:solidFill>
+                <a:srgbClr val="FFFF00"/>
+              </a:solidFill>
+            </a:rPr>
+            <a:t>Decompressed</a:t>
+          </a:r>
+          <a:r>
             <a:rPr lang="en-US" dirty="0" smtClean="0"/>
-            <a:t>Decompressed Genotypes</a:t>
+            <a:t> Genotypes</a:t>
           </a:r>
           <a:endParaRPr lang="en-US" dirty="0"/>
         </a:p>
@@ -4370,7 +4378,7 @@
   <dgm:whole/>
   <dgm:extLst>
     <a:ext uri="http://schemas.microsoft.com/office/drawing/2008/diagram">
-      <dsp:dataModelExt xmlns:dsp="http://schemas.microsoft.com/office/drawing/2008/diagram" relId="rId26" minVer="http://schemas.openxmlformats.org/drawingml/2006/diagram"/>
+      <dsp:dataModelExt xmlns:dsp="http://schemas.microsoft.com/office/drawing/2008/diagram" relId="rId24" minVer="http://schemas.openxmlformats.org/drawingml/2006/diagram"/>
     </a:ext>
   </dgm:extLst>
 </dgm:dataModel>
@@ -6363,8 +6371,16 @@
             </a:spcAft>
           </a:pPr>
           <a:r>
+            <a:rPr lang="en-US" sz="4100" kern="1200" dirty="0" smtClean="0">
+              <a:solidFill>
+                <a:srgbClr val="FFFF00"/>
+              </a:solidFill>
+            </a:rPr>
+            <a:t>Decompressed</a:t>
+          </a:r>
+          <a:r>
             <a:rPr lang="en-US" sz="4100" kern="1200" dirty="0" smtClean="0"/>
-            <a:t>Decompressed Genotypes</a:t>
+            <a:t> Genotypes</a:t>
           </a:r>
           <a:endParaRPr lang="en-US" sz="4100" kern="1200" dirty="0"/>
         </a:p>
@@ -11486,7 +11502,7 @@
             <a:fld id="{A5F985E0-AC7B-3D4C-A5BD-9CFE8A2EAC6A}" type="datetimeFigureOut">
               <a:rPr lang="en-US" smtClean="0"/>
               <a:pPr/>
-              <a:t>9/27/17</a:t>
+              <a:t>10/9/17</a:t>
             </a:fld>
             <a:endParaRPr lang="en-US" dirty="0"/>
           </a:p>
@@ -12038,7 +12054,7 @@
             <a:fld id="{845C0A24-95E3-E24B-9E79-9271EC8244CA}" type="datetimeFigureOut">
               <a:rPr lang="en-US" smtClean="0"/>
               <a:pPr/>
-              <a:t>9/27/17</a:t>
+              <a:t>10/9/17</a:t>
             </a:fld>
             <a:endParaRPr lang="en-US" dirty="0"/>
           </a:p>
@@ -12205,7 +12221,7 @@
             <a:fld id="{845C0A24-95E3-E24B-9E79-9271EC8244CA}" type="datetimeFigureOut">
               <a:rPr lang="en-US" smtClean="0"/>
               <a:pPr/>
-              <a:t>9/27/17</a:t>
+              <a:t>10/9/17</a:t>
             </a:fld>
             <a:endParaRPr lang="en-US" dirty="0"/>
           </a:p>
@@ -12382,7 +12398,7 @@
             <a:fld id="{845C0A24-95E3-E24B-9E79-9271EC8244CA}" type="datetimeFigureOut">
               <a:rPr lang="en-US" smtClean="0"/>
               <a:pPr/>
-              <a:t>9/27/17</a:t>
+              <a:t>10/9/17</a:t>
             </a:fld>
             <a:endParaRPr lang="en-US" dirty="0"/>
           </a:p>
@@ -12549,7 +12565,7 @@
             <a:fld id="{845C0A24-95E3-E24B-9E79-9271EC8244CA}" type="datetimeFigureOut">
               <a:rPr lang="en-US" smtClean="0"/>
               <a:pPr/>
-              <a:t>9/27/17</a:t>
+              <a:t>10/9/17</a:t>
             </a:fld>
             <a:endParaRPr lang="en-US" dirty="0"/>
           </a:p>
@@ -12792,7 +12808,7 @@
             <a:fld id="{845C0A24-95E3-E24B-9E79-9271EC8244CA}" type="datetimeFigureOut">
               <a:rPr lang="en-US" smtClean="0"/>
               <a:pPr/>
-              <a:t>9/27/17</a:t>
+              <a:t>10/9/17</a:t>
             </a:fld>
             <a:endParaRPr lang="en-US" dirty="0"/>
           </a:p>
@@ -13077,7 +13093,7 @@
             <a:fld id="{845C0A24-95E3-E24B-9E79-9271EC8244CA}" type="datetimeFigureOut">
               <a:rPr lang="en-US" smtClean="0"/>
               <a:pPr/>
-              <a:t>9/27/17</a:t>
+              <a:t>10/9/17</a:t>
             </a:fld>
             <a:endParaRPr lang="en-US" dirty="0"/>
           </a:p>
@@ -13496,7 +13512,7 @@
             <a:fld id="{845C0A24-95E3-E24B-9E79-9271EC8244CA}" type="datetimeFigureOut">
               <a:rPr lang="en-US" smtClean="0"/>
               <a:pPr/>
-              <a:t>9/27/17</a:t>
+              <a:t>10/9/17</a:t>
             </a:fld>
             <a:endParaRPr lang="en-US" dirty="0"/>
           </a:p>
@@ -13611,7 +13627,7 @@
             <a:fld id="{845C0A24-95E3-E24B-9E79-9271EC8244CA}" type="datetimeFigureOut">
               <a:rPr lang="en-US" smtClean="0"/>
               <a:pPr/>
-              <a:t>9/27/17</a:t>
+              <a:t>10/9/17</a:t>
             </a:fld>
             <a:endParaRPr lang="en-US" dirty="0"/>
           </a:p>
@@ -13703,7 +13719,7 @@
             <a:fld id="{845C0A24-95E3-E24B-9E79-9271EC8244CA}" type="datetimeFigureOut">
               <a:rPr lang="en-US" smtClean="0"/>
               <a:pPr/>
-              <a:t>9/27/17</a:t>
+              <a:t>10/9/17</a:t>
             </a:fld>
             <a:endParaRPr lang="en-US" dirty="0"/>
           </a:p>
@@ -13977,7 +13993,7 @@
             <a:fld id="{845C0A24-95E3-E24B-9E79-9271EC8244CA}" type="datetimeFigureOut">
               <a:rPr lang="en-US" smtClean="0"/>
               <a:pPr/>
-              <a:t>9/27/17</a:t>
+              <a:t>10/9/17</a:t>
             </a:fld>
             <a:endParaRPr lang="en-US" dirty="0"/>
           </a:p>
@@ -14227,7 +14243,7 @@
             <a:fld id="{845C0A24-95E3-E24B-9E79-9271EC8244CA}" type="datetimeFigureOut">
               <a:rPr lang="en-US" smtClean="0"/>
               <a:pPr/>
-              <a:t>9/27/17</a:t>
+              <a:t>10/9/17</a:t>
             </a:fld>
             <a:endParaRPr lang="en-US" dirty="0"/>
           </a:p>
@@ -14437,7 +14453,7 @@
             <a:fld id="{845C0A24-95E3-E24B-9E79-9271EC8244CA}" type="datetimeFigureOut">
               <a:rPr lang="en-US" smtClean="0"/>
               <a:pPr/>
-              <a:t>9/27/17</a:t>
+              <a:t>10/9/17</a:t>
             </a:fld>
             <a:endParaRPr lang="en-US" dirty="0"/>
           </a:p>
@@ -15150,7 +15166,23 @@
                   <a:srgbClr val="000000"/>
                 </a:solidFill>
               </a:rPr>
-              <a:t>Data reformatting tool in C++ for genetic analysis.</a:t>
+              <a:t>Data reformatting tool in C++ for genetic analysis</a:t>
+            </a:r>
+            <a:r>
+              <a:rPr lang="en-US" sz="4800" dirty="0" smtClean="0">
+                <a:solidFill>
+                  <a:srgbClr val="000000"/>
+                </a:solidFill>
+              </a:rPr>
+              <a:t>. </a:t>
+            </a:r>
+            <a:r>
+              <a:rPr lang="en-US" sz="4800" baseline="30000" dirty="0" smtClean="0">
+                <a:solidFill>
+                  <a:srgbClr val="000000"/>
+                </a:solidFill>
+              </a:rPr>
+              <a:t>1,2</a:t>
             </a:r>
             <a:endParaRPr lang="en-US" sz="4800" dirty="0" smtClean="0">
               <a:solidFill>
@@ -15202,8 +15234,8 @@
         </p:nvSpPr>
         <p:spPr>
           <a:xfrm>
-            <a:off x="301778" y="36113829"/>
-            <a:ext cx="29072534" cy="4154983"/>
+            <a:off x="301778" y="35508892"/>
+            <a:ext cx="30381422" cy="4770537"/>
           </a:xfrm>
           <a:prstGeom prst="rect">
             <a:avLst/>
@@ -15275,11 +15307,37 @@
             </a:r>
             <a:r>
               <a:rPr lang="en-US" sz="4000" dirty="0" smtClean="0"/>
-              <a:t> et al. (2005) Mega2: data-handling for facilitating genetic linkage and association analyses. Bioinformatics 21:2556-</a:t>
+              <a:t> et al. (2005) Mega2: data-handling for facilitating genetic linkage and association analyses. Bioinformatics 21:2556-255</a:t>
             </a:r>
             <a:r>
               <a:rPr lang="en-US" sz="4000" dirty="0" smtClean="0"/>
-              <a:t>255.</a:t>
+              <a:t>.</a:t>
+            </a:r>
+          </a:p>
+          <a:p>
+            <a:pPr marL="742950" indent="-742950">
+              <a:buFont typeface="+mj-lt"/>
+              <a:buAutoNum type="arabicPeriod"/>
+            </a:pPr>
+            <a:r>
+              <a:rPr lang="en-US" sz="4000" dirty="0" err="1" smtClean="0"/>
+              <a:t>Schaid</a:t>
+            </a:r>
+            <a:r>
+              <a:rPr lang="en-US" sz="4000" dirty="0"/>
+              <a:t> </a:t>
+            </a:r>
+            <a:r>
+              <a:rPr lang="en-US" sz="4000" dirty="0" smtClean="0"/>
+              <a:t>et al. (2013) Multiple genetic variant association testing by collapsing and kernel methods with pedigree or population structured data. Genet </a:t>
+            </a:r>
+            <a:r>
+              <a:rPr lang="en-US" sz="4000" dirty="0" err="1" smtClean="0"/>
+              <a:t>Epidimiol</a:t>
+            </a:r>
+            <a:r>
+              <a:rPr lang="en-US" sz="4000" dirty="0" smtClean="0"/>
+              <a:t> 37(5):408-418.</a:t>
             </a:r>
             <a:endParaRPr lang="en-US" sz="4000" dirty="0" smtClean="0"/>
           </a:p>
@@ -15289,51 +15347,16 @@
               <a:buAutoNum type="arabicPeriod"/>
             </a:pPr>
             <a:r>
-              <a:rPr lang="en-US" sz="4000" dirty="0" err="1"/>
-              <a:t>Schaid</a:t>
-            </a:r>
-            <a:r>
-              <a:rPr lang="en-US" sz="4000" dirty="0"/>
-              <a:t> Daniel and Jason </a:t>
-            </a:r>
-            <a:r>
-              <a:rPr lang="en-US" sz="4000" dirty="0" err="1"/>
-              <a:t>Sinnwell</a:t>
-            </a:r>
-            <a:r>
-              <a:rPr lang="en-US" sz="4000" dirty="0"/>
-              <a:t> (2015). </a:t>
-            </a:r>
-            <a:r>
-              <a:rPr lang="en-US" sz="4000" dirty="0" err="1" smtClean="0"/>
-              <a:t>Pedgene:Gene</a:t>
-            </a:r>
-            <a:r>
-              <a:rPr lang="en-US" sz="4000" dirty="0" err="1"/>
-              <a:t>-Level</a:t>
-            </a:r>
-            <a:r>
-              <a:rPr lang="en-US" sz="4000" dirty="0"/>
-              <a:t> Statistics for Pedigree Data. R package </a:t>
-            </a:r>
-            <a:r>
-              <a:rPr lang="en-US" sz="4000" dirty="0" smtClean="0"/>
-              <a:t>version2.9.</a:t>
-            </a:r>
-            <a:endParaRPr lang="en-US" sz="4000" dirty="0" smtClean="0"/>
-          </a:p>
-          <a:p>
-            <a:pPr marL="742950" indent="-742950">
-              <a:buFont typeface="+mj-lt"/>
-              <a:buAutoNum type="arabicPeriod"/>
-            </a:pPr>
-            <a:r>
               <a:rPr lang="en-US" sz="4000" dirty="0" err="1" smtClean="0"/>
               <a:t>Aulchenko</a:t>
             </a:r>
             <a:r>
               <a:rPr lang="en-US" sz="4000" dirty="0" smtClean="0"/>
-              <a:t> YS et al. (2007) </a:t>
+              <a:t> </a:t>
+            </a:r>
+            <a:r>
+              <a:rPr lang="en-US" sz="4000" dirty="0" smtClean="0"/>
+              <a:t>YS et al. (2007) </a:t>
             </a:r>
             <a:r>
               <a:rPr lang="en-US" sz="4000" dirty="0" err="1" smtClean="0"/>
@@ -15341,13 +15364,8 @@
             </a:r>
             <a:r>
               <a:rPr lang="en-US" sz="4000" dirty="0" smtClean="0"/>
-              <a:t>: an R library for genome-wide association analysis. Bioinformatics. 2007 May 15;</a:t>
-            </a:r>
-            <a:r>
-              <a:rPr lang="en-US" sz="4000" dirty="0" smtClean="0"/>
-              <a:t>23(10):1294-6.</a:t>
-            </a:r>
-            <a:endParaRPr lang="en-US" sz="4000" dirty="0" smtClean="0"/>
+              <a:t>: an R library for genome-wide association analysis. Bioinformatics. 2007 May 15;23(10):1294-6.</a:t>
+            </a:r>
           </a:p>
           <a:p>
             <a:pPr marL="742950" indent="-742950">
@@ -15366,7 +15384,7 @@
         </p:nvSpPr>
         <p:spPr>
           <a:xfrm>
-            <a:off x="301780" y="39188886"/>
+            <a:off x="301780" y="39446200"/>
             <a:ext cx="18474930" cy="707886"/>
           </a:xfrm>
           <a:prstGeom prst="rect">
@@ -15396,30 +15414,6 @@
           </a:p>
         </p:txBody>
       </p:sp>
-      <p:pic>
-        <p:nvPicPr>
-          <p:cNvPr id="29" name="Picture 28" descr="chart.png"/>
-          <p:cNvPicPr>
-            <a:picLocks noChangeAspect="1"/>
-          </p:cNvPicPr>
-          <p:nvPr/>
-        </p:nvPicPr>
-        <p:blipFill>
-          <a:blip r:embed="rId4"/>
-          <a:stretch>
-            <a:fillRect/>
-          </a:stretch>
-        </p:blipFill>
-        <p:spPr>
-          <a:xfrm>
-            <a:off x="2792608" y="34145499"/>
-            <a:ext cx="1505902" cy="1505902"/>
-          </a:xfrm>
-          <a:prstGeom prst="rect">
-            <a:avLst/>
-          </a:prstGeom>
-        </p:spPr>
-      </p:pic>
       <p:sp>
         <p:nvSpPr>
           <p:cNvPr id="30" name="TextBox 29"/>
@@ -15428,8 +15422,8 @@
         </p:nvSpPr>
         <p:spPr>
           <a:xfrm>
-            <a:off x="758978" y="34517034"/>
-            <a:ext cx="2055170" cy="707886"/>
+            <a:off x="5788525" y="34371410"/>
+            <a:ext cx="2316660" cy="707886"/>
           </a:xfrm>
           <a:prstGeom prst="rect">
             <a:avLst/>
@@ -15444,64 +15438,15 @@
           <a:p>
             <a:r>
               <a:rPr lang="en-US" sz="4000" dirty="0" smtClean="0"/>
-              <a:t>Poster -&gt;</a:t>
+              <a:t>Mega2R-</a:t>
+            </a:r>
+            <a:r>
+              <a:rPr lang="en-US" sz="4000" dirty="0" smtClean="0"/>
+              <a:t>&gt;</a:t>
             </a:r>
           </a:p>
         </p:txBody>
       </p:sp>
-      <p:sp>
-        <p:nvSpPr>
-          <p:cNvPr id="31" name="TextBox 30"/>
-          <p:cNvSpPr txBox="1"/>
-          <p:nvPr/>
-        </p:nvSpPr>
-        <p:spPr>
-          <a:xfrm>
-            <a:off x="4869722" y="34517034"/>
-            <a:ext cx="2298125" cy="707886"/>
-          </a:xfrm>
-          <a:prstGeom prst="rect">
-            <a:avLst/>
-          </a:prstGeom>
-          <a:noFill/>
-        </p:spPr>
-        <p:txBody>
-          <a:bodyPr wrap="none" rtlCol="0">
-            <a:spAutoFit/>
-          </a:bodyPr>
-          <a:lstStyle/>
-          <a:p>
-            <a:r>
-              <a:rPr lang="en-US" sz="4000" dirty="0" smtClean="0"/>
-              <a:t>Tutorial -&gt;  </a:t>
-            </a:r>
-          </a:p>
-        </p:txBody>
-      </p:sp>
-      <p:pic>
-        <p:nvPicPr>
-          <p:cNvPr id="32" name="Picture 31" descr="chart.png"/>
-          <p:cNvPicPr>
-            <a:picLocks noChangeAspect="1"/>
-          </p:cNvPicPr>
-          <p:nvPr/>
-        </p:nvPicPr>
-        <p:blipFill>
-          <a:blip r:embed="rId5"/>
-          <a:stretch>
-            <a:fillRect/>
-          </a:stretch>
-        </p:blipFill>
-        <p:spPr>
-          <a:xfrm>
-            <a:off x="7349703" y="34145499"/>
-            <a:ext cx="1505902" cy="1505902"/>
-          </a:xfrm>
-          <a:prstGeom prst="rect">
-            <a:avLst/>
-          </a:prstGeom>
-        </p:spPr>
-      </p:pic>
       <p:graphicFrame>
         <p:nvGraphicFramePr>
           <p:cNvPr id="3" name="Table 2"/>
@@ -15511,7 +15456,7 @@
           <p:nvPr>
             <p:extLst>
               <p:ext uri="{D42A27DB-BD31-4B8C-83A1-F6EECF244321}">
-                <p14:modId xmlns:p14="http://schemas.microsoft.com/office/powerpoint/2010/main" val="2640162528"/>
+                <p14:modId xmlns:p14="http://schemas.microsoft.com/office/powerpoint/2010/main" val="2100559740"/>
               </p:ext>
             </p:extLst>
           </p:nvPr>
@@ -15527,8 +15472,8 @@
                 <a:tableStyleId>{22838BEF-8BB2-4498-84A7-C5851F593DF1}</a:tableStyleId>
               </a:tblPr>
               <a:tblGrid>
-                <a:gridCol w="4572000"/>
-                <a:gridCol w="4572000"/>
+                <a:gridCol w="5102815"/>
+                <a:gridCol w="4041185"/>
               </a:tblGrid>
               <a:tr h="0">
                 <a:tc>
@@ -15536,11 +15481,27 @@
                     <a:bodyPr/>
                     <a:lstStyle/>
                     <a:p>
+                      <a:pPr marL="0" marR="0" indent="0" algn="l" defTabSz="2037786" rtl="0" eaLnBrk="1" fontAlgn="auto" latinLnBrk="0" hangingPunct="1">
+                        <a:lnSpc>
+                          <a:spcPct val="100000"/>
+                        </a:lnSpc>
+                        <a:spcBef>
+                          <a:spcPts val="0"/>
+                        </a:spcBef>
+                        <a:spcAft>
+                          <a:spcPts val="0"/>
+                        </a:spcAft>
+                        <a:buClrTx/>
+                        <a:buSzTx/>
+                        <a:buFontTx/>
+                        <a:buNone/>
+                        <a:tabLst/>
+                        <a:defRPr/>
+                      </a:pPr>
                       <a:r>
                         <a:rPr lang="en-US" sz="4800" dirty="0" smtClean="0"/>
-                        <a:t>Annotated</a:t>
+                        <a:t>PLINK PED/BED</a:t>
                       </a:r>
-                      <a:endParaRPr lang="en-US" sz="4800" dirty="0"/>
                     </a:p>
                   </a:txBody>
                   <a:tcPr/>
@@ -15552,7 +15513,7 @@
                     <a:p>
                       <a:r>
                         <a:rPr lang="en-US" sz="4800" dirty="0" smtClean="0"/>
-                        <a:t>PLINK PED/BED</a:t>
+                        <a:t>VCF/BCF</a:t>
                       </a:r>
                       <a:endParaRPr lang="en-US" sz="4800" dirty="0"/>
                     </a:p>
@@ -15568,7 +15529,7 @@
                     <a:p>
                       <a:r>
                         <a:rPr lang="en-US" sz="4800" dirty="0" smtClean="0"/>
-                        <a:t>VCF/BCF</a:t>
+                        <a:t>Linkage</a:t>
                       </a:r>
                       <a:endParaRPr lang="en-US" sz="4800" dirty="0"/>
                     </a:p>
@@ -15598,7 +15559,7 @@
                     <a:p>
                       <a:r>
                         <a:rPr lang="en-US" sz="4800" dirty="0" smtClean="0"/>
-                        <a:t>Linkage</a:t>
+                        <a:t>Mega2 Annotated</a:t>
                       </a:r>
                       <a:endParaRPr lang="en-US" sz="4800" dirty="0"/>
                     </a:p>
@@ -15836,13 +15797,13 @@
           <a:p>
             <a:r>
               <a:rPr lang="en-US" sz="4800" dirty="0" smtClean="0">
-                <a:hlinkClick r:id="rId6"/>
+                <a:hlinkClick r:id="rId4"/>
               </a:rPr>
               <a:t>https:</a:t>
             </a:r>
             <a:r>
               <a:rPr lang="en-US" sz="4800" dirty="0">
-                <a:hlinkClick r:id="rId6"/>
+                <a:hlinkClick r:id="rId4"/>
               </a:rPr>
               <a:t>//watson.hgen.pitt.edu/register/</a:t>
             </a:r>
@@ -15905,7 +15866,7 @@
           <p:nvPr>
             <p:extLst>
               <p:ext uri="{D42A27DB-BD31-4B8C-83A1-F6EECF244321}">
-                <p14:modId xmlns:p14="http://schemas.microsoft.com/office/powerpoint/2010/main" val="1854982339"/>
+                <p14:modId xmlns:p14="http://schemas.microsoft.com/office/powerpoint/2010/main" val="278939953"/>
               </p:ext>
             </p:extLst>
           </p:nvPr>
@@ -16156,7 +16117,7 @@
                     <a:p>
                       <a:r>
                         <a:rPr lang="en-US" sz="4800" dirty="0" smtClean="0"/>
-                        <a:t>Simwalk2</a:t>
+                        <a:t>Mega2 Annotated</a:t>
                       </a:r>
                       <a:endParaRPr lang="en-US" sz="4800" dirty="0"/>
                     </a:p>
@@ -16170,7 +16131,7 @@
                     <a:p>
                       <a:r>
                         <a:rPr lang="en-US" sz="4800" dirty="0" smtClean="0"/>
-                        <a:t>Annotated</a:t>
+                        <a:t>Simwalk2</a:t>
                       </a:r>
                       <a:endParaRPr lang="en-US" sz="4800" dirty="0"/>
                     </a:p>
@@ -16286,7 +16247,7 @@
         </p:xfrm>
         <a:graphic>
           <a:graphicData uri="http://schemas.openxmlformats.org/drawingml/2006/diagram">
-            <dgm:relIds xmlns:dgm="http://schemas.openxmlformats.org/drawingml/2006/diagram" xmlns:r="http://schemas.openxmlformats.org/officeDocument/2006/relationships" r:dm="rId7" r:lo="rId8" r:qs="rId9" r:cs="rId10"/>
+            <dgm:relIds xmlns:dgm="http://schemas.openxmlformats.org/drawingml/2006/diagram" xmlns:r="http://schemas.openxmlformats.org/officeDocument/2006/relationships" r:dm="rId5" r:lo="rId6" r:qs="rId7" r:cs="rId8"/>
           </a:graphicData>
         </a:graphic>
       </p:graphicFrame>
@@ -16298,7 +16259,7 @@
         </p:nvSpPr>
         <p:spPr>
           <a:xfrm>
-            <a:off x="11146544" y="24695342"/>
+            <a:off x="11146544" y="24466742"/>
             <a:ext cx="9144000" cy="10433624"/>
           </a:xfrm>
           <a:prstGeom prst="rect">
@@ -16476,7 +16437,7 @@
         </p:xfrm>
         <a:graphic>
           <a:graphicData uri="http://schemas.openxmlformats.org/drawingml/2006/diagram">
-            <dgm:relIds xmlns:dgm="http://schemas.openxmlformats.org/drawingml/2006/diagram" xmlns:r="http://schemas.openxmlformats.org/officeDocument/2006/relationships" r:dm="rId12" r:lo="rId13" r:qs="rId14" r:cs="rId15"/>
+            <dgm:relIds xmlns:dgm="http://schemas.openxmlformats.org/drawingml/2006/diagram" xmlns:r="http://schemas.openxmlformats.org/officeDocument/2006/relationships" r:dm="rId10" r:lo="rId11" r:qs="rId12" r:cs="rId13"/>
           </a:graphicData>
         </a:graphic>
       </p:graphicFrame>
@@ -16498,7 +16459,7 @@
         </p:xfrm>
         <a:graphic>
           <a:graphicData uri="http://schemas.openxmlformats.org/drawingml/2006/diagram">
-            <dgm:relIds xmlns:dgm="http://schemas.openxmlformats.org/drawingml/2006/diagram" xmlns:r="http://schemas.openxmlformats.org/officeDocument/2006/relationships" r:dm="rId17" r:lo="rId18" r:qs="rId19" r:cs="rId20"/>
+            <dgm:relIds xmlns:dgm="http://schemas.openxmlformats.org/drawingml/2006/diagram" xmlns:r="http://schemas.openxmlformats.org/officeDocument/2006/relationships" r:dm="rId15" r:lo="rId16" r:qs="rId17" r:cs="rId18"/>
           </a:graphicData>
         </a:graphic>
       </p:graphicFrame>
@@ -16509,7 +16470,7 @@
           <p:nvPr>
             <p:extLst>
               <p:ext uri="{D42A27DB-BD31-4B8C-83A1-F6EECF244321}">
-                <p14:modId xmlns:p14="http://schemas.microsoft.com/office/powerpoint/2010/main" val="1728499888"/>
+                <p14:modId xmlns:p14="http://schemas.microsoft.com/office/powerpoint/2010/main" val="1826584303"/>
               </p:ext>
             </p:extLst>
           </p:nvPr>
@@ -16520,7 +16481,7 @@
         </p:xfrm>
         <a:graphic>
           <a:graphicData uri="http://schemas.openxmlformats.org/drawingml/2006/diagram">
-            <dgm:relIds xmlns:dgm="http://schemas.openxmlformats.org/drawingml/2006/diagram" xmlns:r="http://schemas.openxmlformats.org/officeDocument/2006/relationships" r:dm="rId22" r:lo="rId23" r:qs="rId24" r:cs="rId25"/>
+            <dgm:relIds xmlns:dgm="http://schemas.openxmlformats.org/drawingml/2006/diagram" xmlns:r="http://schemas.openxmlformats.org/officeDocument/2006/relationships" r:dm="rId20" r:lo="rId21" r:qs="rId22" r:cs="rId23"/>
           </a:graphicData>
         </a:graphic>
       </p:graphicFrame>
@@ -16532,8 +16493,8 @@
         </p:nvSpPr>
         <p:spPr>
           <a:xfrm>
-            <a:off x="21084646" y="30733030"/>
-            <a:ext cx="9144000" cy="6001643"/>
+            <a:off x="21089939" y="30094668"/>
+            <a:ext cx="9144000" cy="4524315"/>
           </a:xfrm>
           <a:prstGeom prst="rect">
             <a:avLst/>
@@ -16685,23 +16646,7 @@
             </a:r>
             <a:r>
               <a:rPr lang="en-US" sz="4800" dirty="0" smtClean="0"/>
-              <a:t>CRAN</a:t>
-            </a:r>
-            <a:r>
-              <a:rPr lang="en-US" sz="4800" dirty="0"/>
-              <a:t>, </a:t>
-            </a:r>
-            <a:r>
-              <a:rPr lang="en-US" sz="4800" dirty="0">
-                <a:hlinkClick r:id="rId27"/>
-              </a:rPr>
-              <a:t>https://bitbucket.org/dweeks/</a:t>
-            </a:r>
-            <a:r>
-              <a:rPr lang="en-US" sz="4800" dirty="0" smtClean="0">
-                <a:hlinkClick r:id="rId27"/>
-              </a:rPr>
-              <a:t>mega2</a:t>
+              <a:t>CRAN </a:t>
             </a:r>
             <a:endParaRPr lang="en-US" sz="4800" dirty="0"/>
           </a:p>
@@ -16759,119 +16704,6 @@
           </a:p>
         </p:txBody>
       </p:sp>
-      <p:grpSp>
-        <p:nvGrpSpPr>
-          <p:cNvPr id="33" name="Group 32"/>
-          <p:cNvGrpSpPr/>
-          <p:nvPr/>
-        </p:nvGrpSpPr>
-        <p:grpSpPr>
-          <a:xfrm rot="5400000">
-            <a:off x="25238187" y="11918041"/>
-            <a:ext cx="1028700" cy="857250"/>
-            <a:chOff x="1314449" y="5857875"/>
-            <a:chExt cx="1028700" cy="857250"/>
-          </a:xfrm>
-        </p:grpSpPr>
-        <p:sp>
-          <p:nvSpPr>
-            <p:cNvPr id="34" name="Left Arrow 33"/>
-            <p:cNvSpPr/>
-            <p:nvPr/>
-          </p:nvSpPr>
-          <p:spPr>
-            <a:xfrm rot="5400000">
-              <a:off x="1400174" y="5772150"/>
-              <a:ext cx="857250" cy="1028700"/>
-            </a:xfrm>
-            <a:prstGeom prst="leftArrow">
-              <a:avLst/>
-            </a:prstGeom>
-          </p:spPr>
-          <p:style>
-            <a:lnRef idx="0">
-              <a:schemeClr val="accent1">
-                <a:tint val="60000"/>
-                <a:hueOff val="0"/>
-                <a:satOff val="0"/>
-                <a:lumOff val="0"/>
-                <a:alphaOff val="0"/>
-              </a:schemeClr>
-            </a:lnRef>
-            <a:fillRef idx="2">
-              <a:schemeClr val="accent1">
-                <a:tint val="60000"/>
-                <a:hueOff val="0"/>
-                <a:satOff val="0"/>
-                <a:lumOff val="0"/>
-                <a:alphaOff val="0"/>
-              </a:schemeClr>
-            </a:fillRef>
-            <a:effectRef idx="1">
-              <a:schemeClr val="accent1">
-                <a:tint val="60000"/>
-                <a:hueOff val="0"/>
-                <a:satOff val="0"/>
-                <a:lumOff val="0"/>
-                <a:alphaOff val="0"/>
-              </a:schemeClr>
-            </a:effectRef>
-            <a:fontRef idx="minor">
-              <a:schemeClr val="dk1"/>
-            </a:fontRef>
-          </p:style>
-        </p:sp>
-        <p:sp>
-          <p:nvSpPr>
-            <p:cNvPr id="36" name="Left Arrow 4"/>
-            <p:cNvSpPr/>
-            <p:nvPr/>
-          </p:nvSpPr>
-          <p:spPr>
-            <a:xfrm>
-              <a:off x="1520190" y="5857875"/>
-              <a:ext cx="617220" cy="600075"/>
-            </a:xfrm>
-            <a:prstGeom prst="rect">
-              <a:avLst/>
-            </a:prstGeom>
-          </p:spPr>
-          <p:style>
-            <a:lnRef idx="0">
-              <a:scrgbClr r="0" g="0" b="0"/>
-            </a:lnRef>
-            <a:fillRef idx="0">
-              <a:scrgbClr r="0" g="0" b="0"/>
-            </a:fillRef>
-            <a:effectRef idx="0">
-              <a:scrgbClr r="0" g="0" b="0"/>
-            </a:effectRef>
-            <a:fontRef idx="minor">
-              <a:schemeClr val="dk1"/>
-            </a:fontRef>
-          </p:style>
-          <p:txBody>
-            <a:bodyPr spcFirstLastPara="0" vert="horz" wrap="square" lIns="0" tIns="0" rIns="0" bIns="0" numCol="1" spcCol="1270" anchor="ctr" anchorCtr="0">
-              <a:noAutofit/>
-            </a:bodyPr>
-            <a:lstStyle/>
-            <a:p>
-              <a:pPr lvl="0" algn="ctr" defTabSz="1422400">
-                <a:lnSpc>
-                  <a:spcPct val="90000"/>
-                </a:lnSpc>
-                <a:spcBef>
-                  <a:spcPct val="0"/>
-                </a:spcBef>
-                <a:spcAft>
-                  <a:spcPct val="35000"/>
-                </a:spcAft>
-              </a:pPr>
-              <a:endParaRPr lang="en-US" sz="3200" kern="1200"/>
-            </a:p>
-          </p:txBody>
-        </p:sp>
-      </p:grpSp>
       <p:sp>
         <p:nvSpPr>
           <p:cNvPr id="5" name="TextBox 4"/>
@@ -16940,6 +16772,213 @@
           </a:fontRef>
         </p:style>
       </p:cxnSp>
+      <p:grpSp>
+        <p:nvGrpSpPr>
+          <p:cNvPr id="37" name="Group 36"/>
+          <p:cNvGrpSpPr/>
+          <p:nvPr/>
+        </p:nvGrpSpPr>
+        <p:grpSpPr>
+          <a:xfrm rot="16200000">
+            <a:off x="25187275" y="11756759"/>
+            <a:ext cx="1028700" cy="857250"/>
+            <a:chOff x="1314449" y="2428875"/>
+            <a:chExt cx="1028700" cy="857250"/>
+          </a:xfrm>
+        </p:grpSpPr>
+        <p:sp>
+          <p:nvSpPr>
+            <p:cNvPr id="38" name="Right Arrow 37"/>
+            <p:cNvSpPr/>
+            <p:nvPr/>
+          </p:nvSpPr>
+          <p:spPr>
+            <a:xfrm rot="5400000">
+              <a:off x="1400174" y="2343150"/>
+              <a:ext cx="857250" cy="1028700"/>
+            </a:xfrm>
+            <a:prstGeom prst="rightArrow">
+              <a:avLst>
+                <a:gd name="adj1" fmla="val 60000"/>
+                <a:gd name="adj2" fmla="val 50000"/>
+              </a:avLst>
+            </a:prstGeom>
+          </p:spPr>
+          <p:style>
+            <a:lnRef idx="0">
+              <a:schemeClr val="accent1">
+                <a:tint val="60000"/>
+                <a:hueOff val="0"/>
+                <a:satOff val="0"/>
+                <a:lumOff val="0"/>
+                <a:alphaOff val="0"/>
+              </a:schemeClr>
+            </a:lnRef>
+            <a:fillRef idx="1">
+              <a:schemeClr val="accent1">
+                <a:tint val="60000"/>
+                <a:hueOff val="0"/>
+                <a:satOff val="0"/>
+                <a:lumOff val="0"/>
+                <a:alphaOff val="0"/>
+              </a:schemeClr>
+            </a:fillRef>
+            <a:effectRef idx="1">
+              <a:schemeClr val="accent1">
+                <a:tint val="60000"/>
+                <a:hueOff val="0"/>
+                <a:satOff val="0"/>
+                <a:lumOff val="0"/>
+                <a:alphaOff val="0"/>
+              </a:schemeClr>
+            </a:effectRef>
+            <a:fontRef idx="minor">
+              <a:schemeClr val="lt1"/>
+            </a:fontRef>
+          </p:style>
+        </p:sp>
+        <p:sp>
+          <p:nvSpPr>
+            <p:cNvPr id="39" name="Right Arrow 4"/>
+            <p:cNvSpPr/>
+            <p:nvPr/>
+          </p:nvSpPr>
+          <p:spPr>
+            <a:xfrm>
+              <a:off x="1520190" y="2428875"/>
+              <a:ext cx="617220" cy="600075"/>
+            </a:xfrm>
+            <a:prstGeom prst="rect">
+              <a:avLst/>
+            </a:prstGeom>
+          </p:spPr>
+          <p:style>
+            <a:lnRef idx="0">
+              <a:scrgbClr r="0" g="0" b="0"/>
+            </a:lnRef>
+            <a:fillRef idx="0">
+              <a:scrgbClr r="0" g="0" b="0"/>
+            </a:fillRef>
+            <a:effectRef idx="0">
+              <a:scrgbClr r="0" g="0" b="0"/>
+            </a:effectRef>
+            <a:fontRef idx="minor">
+              <a:schemeClr val="lt1"/>
+            </a:fontRef>
+          </p:style>
+          <p:txBody>
+            <a:bodyPr spcFirstLastPara="0" vert="horz" wrap="square" lIns="0" tIns="0" rIns="0" bIns="0" numCol="1" spcCol="1270" anchor="ctr" anchorCtr="0">
+              <a:noAutofit/>
+            </a:bodyPr>
+            <a:lstStyle/>
+            <a:p>
+              <a:pPr lvl="0" algn="ctr" defTabSz="1422400">
+                <a:lnSpc>
+                  <a:spcPct val="90000"/>
+                </a:lnSpc>
+                <a:spcBef>
+                  <a:spcPct val="0"/>
+                </a:spcBef>
+                <a:spcAft>
+                  <a:spcPct val="35000"/>
+                </a:spcAft>
+              </a:pPr>
+              <a:endParaRPr lang="en-US" sz="3200" kern="1200"/>
+            </a:p>
+          </p:txBody>
+        </p:sp>
+      </p:grpSp>
+      <p:pic>
+        <p:nvPicPr>
+          <p:cNvPr id="7" name="Picture 6" descr="static_qr_code_without_logo.jpg"/>
+          <p:cNvPicPr>
+            <a:picLocks noChangeAspect="1"/>
+          </p:cNvPicPr>
+          <p:nvPr/>
+        </p:nvPicPr>
+        <p:blipFill rotWithShape="1">
+          <a:blip r:embed="rId25">
+            <a:extLst>
+              <a:ext uri="{28A0092B-C50C-407E-A947-70E740481C1C}">
+                <a14:useLocalDpi xmlns:a14="http://schemas.microsoft.com/office/drawing/2010/main" val="0"/>
+              </a:ext>
+            </a:extLst>
+          </a:blip>
+          <a:srcRect l="-1" t="-1" r="-1" b="-1"/>
+          <a:stretch/>
+        </p:blipFill>
+        <p:spPr>
+          <a:xfrm flipH="1">
+            <a:off x="8105185" y="33354154"/>
+            <a:ext cx="2286000" cy="2286000"/>
+          </a:xfrm>
+          <a:prstGeom prst="rect">
+            <a:avLst/>
+          </a:prstGeom>
+        </p:spPr>
+      </p:pic>
+      <p:pic>
+        <p:nvPicPr>
+          <p:cNvPr id="12" name="Picture 11" descr="static_qr_code_without_logo 2.jpg"/>
+          <p:cNvPicPr>
+            <a:picLocks noChangeAspect="1"/>
+          </p:cNvPicPr>
+          <p:nvPr/>
+        </p:nvPicPr>
+        <p:blipFill rotWithShape="1">
+          <a:blip r:embed="rId26">
+            <a:extLst>
+              <a:ext uri="{28A0092B-C50C-407E-A947-70E740481C1C}">
+                <a14:useLocalDpi xmlns:a14="http://schemas.microsoft.com/office/drawing/2010/main" val="0"/>
+              </a:ext>
+            </a:extLst>
+          </a:blip>
+          <a:srcRect/>
+          <a:stretch/>
+        </p:blipFill>
+        <p:spPr>
+          <a:xfrm>
+            <a:off x="3456357" y="33286862"/>
+            <a:ext cx="2286000" cy="2286000"/>
+          </a:xfrm>
+          <a:prstGeom prst="rect">
+            <a:avLst/>
+          </a:prstGeom>
+        </p:spPr>
+      </p:pic>
+      <p:sp>
+        <p:nvSpPr>
+          <p:cNvPr id="40" name="TextBox 39"/>
+          <p:cNvSpPr txBox="1"/>
+          <p:nvPr/>
+        </p:nvSpPr>
+        <p:spPr>
+          <a:xfrm>
+            <a:off x="1377509" y="34370462"/>
+            <a:ext cx="2038138" cy="707886"/>
+          </a:xfrm>
+          <a:prstGeom prst="rect">
+            <a:avLst/>
+          </a:prstGeom>
+          <a:noFill/>
+        </p:spPr>
+        <p:txBody>
+          <a:bodyPr wrap="none" rtlCol="0">
+            <a:spAutoFit/>
+          </a:bodyPr>
+          <a:lstStyle/>
+          <a:p>
+            <a:r>
+              <a:rPr lang="en-US" sz="4000" dirty="0" smtClean="0"/>
+              <a:t>Mega2-</a:t>
+            </a:r>
+            <a:r>
+              <a:rPr lang="en-US" sz="4000" dirty="0" smtClean="0"/>
+              <a:t>&gt;</a:t>
+            </a:r>
+          </a:p>
+        </p:txBody>
+      </p:sp>
     </p:spTree>
   </p:cSld>
   <p:clrMapOvr>

--- a/mega2_doc/Posters/ASHG_2017/Mega2R_poster_2017.pptx
+++ b/mega2_doc/Posters/ASHG_2017/Mega2R_poster_2017.pptx
@@ -3144,7 +3144,13 @@
     </dgm:pt>
     <dgm:pt modelId="{1DF9D49A-1F01-D047-B0F3-6DA5D4C2C20A}" type="sibTrans" cxnId="{C9571103-2720-064D-84BF-6677D3911366}">
       <dgm:prSet custT="1"/>
-      <dgm:spPr/>
+      <dgm:spPr>
+        <a:ln w="76200">
+          <a:solidFill>
+            <a:schemeClr val="accent1"/>
+          </a:solidFill>
+        </a:ln>
+      </dgm:spPr>
       <dgm:t>
         <a:bodyPr/>
         <a:lstStyle/>
@@ -3181,7 +3187,13 @@
     </dgm:pt>
     <dgm:pt modelId="{87F0D2A9-686F-CF48-8359-81B4CF88D611}" type="sibTrans" cxnId="{A614A408-0BF2-5C4E-BB41-69EB6A017B82}">
       <dgm:prSet custT="1"/>
-      <dgm:spPr/>
+      <dgm:spPr>
+        <a:ln w="76200">
+          <a:solidFill>
+            <a:schemeClr val="accent1"/>
+          </a:solidFill>
+        </a:ln>
+      </dgm:spPr>
       <dgm:t>
         <a:bodyPr/>
         <a:lstStyle/>
@@ -3226,7 +3238,13 @@
     </dgm:pt>
     <dgm:pt modelId="{23F136E6-133E-E247-A871-2B7111BE9BB5}" type="sibTrans" cxnId="{EFFB3C01-743F-4C49-A0CE-218C0E97DADC}">
       <dgm:prSet custT="1"/>
-      <dgm:spPr/>
+      <dgm:spPr>
+        <a:ln w="76200">
+          <a:solidFill>
+            <a:schemeClr val="accent1"/>
+          </a:solidFill>
+        </a:ln>
+      </dgm:spPr>
       <dgm:t>
         <a:bodyPr/>
         <a:lstStyle/>
@@ -3263,7 +3281,13 @@
     </dgm:pt>
     <dgm:pt modelId="{3A6E66D9-20BD-9A4E-B6C5-D34CC68DF325}" type="sibTrans" cxnId="{0E190696-2492-5341-85FD-217BAB9BB0F8}">
       <dgm:prSet custT="1"/>
-      <dgm:spPr/>
+      <dgm:spPr>
+        <a:ln w="76200">
+          <a:solidFill>
+            <a:schemeClr val="accent1"/>
+          </a:solidFill>
+        </a:ln>
+      </dgm:spPr>
       <dgm:t>
         <a:bodyPr/>
         <a:lstStyle/>
@@ -3401,7 +3425,7 @@
       </dgm:t>
     </dgm:pt>
     <dgm:pt modelId="{D0DD2E67-431A-5340-802F-3C027CF0B76B}" type="pres">
-      <dgm:prSet presAssocID="{A3F9FAC9-FC5D-F94D-ACE1-4AC1D9F583BA}" presName="node" presStyleLbl="node1" presStyleIdx="2" presStyleCnt="5">
+      <dgm:prSet presAssocID="{A3F9FAC9-FC5D-F94D-ACE1-4AC1D9F583BA}" presName="node" presStyleLbl="node1" presStyleIdx="2" presStyleCnt="5" custLinFactNeighborY="5240">
         <dgm:presLayoutVars>
           <dgm:bulletEnabled val="1"/>
         </dgm:presLayoutVars>
@@ -3442,7 +3466,7 @@
       </dgm:t>
     </dgm:pt>
     <dgm:pt modelId="{52152AA8-316C-604D-9019-721CD06FF857}" type="pres">
-      <dgm:prSet presAssocID="{6D75B60E-8C59-2944-91E1-C99AB1983F28}" presName="node" presStyleLbl="node1" presStyleIdx="3" presStyleCnt="5" custLinFactNeighborX="-266" custLinFactNeighborY="4389">
+      <dgm:prSet presAssocID="{6D75B60E-8C59-2944-91E1-C99AB1983F28}" presName="node" presStyleLbl="node1" presStyleIdx="3" presStyleCnt="5" custLinFactNeighborX="-266" custLinFactNeighborY="5437">
         <dgm:presLayoutVars>
           <dgm:bulletEnabled val="1"/>
         </dgm:presLayoutVars>
@@ -3483,7 +3507,7 @@
       </dgm:t>
     </dgm:pt>
     <dgm:pt modelId="{F5CB0EC5-FE34-D845-B2E3-7826F43EFBCF}" type="pres">
-      <dgm:prSet presAssocID="{239EA3EB-3FFF-6A4D-B692-4F93B7D049C0}" presName="node" presStyleLbl="node1" presStyleIdx="4" presStyleCnt="5" custLinFactX="23266" custLinFactNeighborX="100000" custLinFactNeighborY="4389">
+      <dgm:prSet presAssocID="{239EA3EB-3FFF-6A4D-B692-4F93B7D049C0}" presName="node" presStyleLbl="node1" presStyleIdx="4" presStyleCnt="5" custLinFactX="22637" custLinFactNeighborX="100000" custLinFactNeighborY="225">
         <dgm:presLayoutVars>
           <dgm:bulletEnabled val="1"/>
         </dgm:presLayoutVars>
@@ -3613,7 +3637,7 @@
         <a:lstStyle/>
         <a:p>
           <a:r>
-            <a:rPr lang="en-US" dirty="0" smtClean="0">
+            <a:rPr lang="en-US" smtClean="0">
               <a:solidFill>
                 <a:srgbClr val="FFFF00"/>
               </a:solidFill>
@@ -3621,7 +3645,7 @@
             <a:t>Loop</a:t>
           </a:r>
           <a:r>
-            <a:rPr lang="en-US" dirty="0" smtClean="0"/>
+            <a:rPr lang="en-US" smtClean="0"/>
             <a:t> over N genes</a:t>
           </a:r>
           <a:endParaRPr lang="en-US" dirty="0"/>
@@ -3658,7 +3682,7 @@
         <a:lstStyle/>
         <a:p>
           <a:r>
-            <a:rPr lang="en-US" dirty="0" smtClean="0">
+            <a:rPr lang="en-US" smtClean="0">
               <a:solidFill>
                 <a:srgbClr val="FFFF00"/>
               </a:solidFill>
@@ -3666,7 +3690,7 @@
             <a:t>Decompress</a:t>
           </a:r>
           <a:r>
-            <a:rPr lang="en-US" dirty="0" smtClean="0"/>
+            <a:rPr lang="en-US" smtClean="0"/>
             <a:t> Range n</a:t>
           </a:r>
           <a:endParaRPr lang="en-US" dirty="0"/>
@@ -3751,6 +3775,13 @@
     <dgm:pt modelId="{5EDDA4D7-DA8A-AF42-BB75-FF82B2E7F98C}" type="pres">
       <dgm:prSet presAssocID="{64CE9D80-5F8D-8A47-AD11-25990CF48EE7}" presName="cycle" presStyleCnt="0"/>
       <dgm:spPr/>
+      <dgm:t>
+        <a:bodyPr/>
+        <a:lstStyle/>
+        <a:p>
+          <a:endParaRPr lang="en-US"/>
+        </a:p>
+      </dgm:t>
     </dgm:pt>
     <dgm:pt modelId="{DE66BBE1-A1F4-CC47-958B-4602E0F65908}" type="pres">
       <dgm:prSet presAssocID="{9C8B8215-D13C-CA40-889A-C34613354D02}" presName="nodeFirstNode" presStyleLbl="node1" presStyleIdx="0" presStyleCnt="4">
@@ -3826,15 +3857,15 @@
   </dgm:ptLst>
   <dgm:cxnLst>
     <dgm:cxn modelId="{5CAA7CF3-5195-E246-B9CB-D70A6C985979}" type="presOf" srcId="{DC0A212C-A33F-6E41-B202-D39315170082}" destId="{AAFA243D-600C-B247-B64C-D3ECA208B9A7}" srcOrd="0" destOrd="0" presId="urn:microsoft.com/office/officeart/2005/8/layout/cycle3"/>
+    <dgm:cxn modelId="{93FD232A-F3F9-F942-886D-72B700B5FDE7}" srcId="{64CE9D80-5F8D-8A47-AD11-25990CF48EE7}" destId="{986F9BCB-EB92-714F-BCE2-5E5CA61830EA}" srcOrd="1" destOrd="0" parTransId="{FCE15DAC-7C21-3146-B33B-565090AD3161}" sibTransId="{21843FB2-6972-D241-89AF-D3C7F8A34CEB}"/>
+    <dgm:cxn modelId="{9E61AA45-07FF-D644-A60C-67CAC443AE80}" type="presOf" srcId="{64CE9D80-5F8D-8A47-AD11-25990CF48EE7}" destId="{588784B2-E0AE-FD4D-A405-F11267A4FBA6}" srcOrd="0" destOrd="0" presId="urn:microsoft.com/office/officeart/2005/8/layout/cycle3"/>
+    <dgm:cxn modelId="{96BA6E64-5912-2F48-B292-3C958F411006}" srcId="{64CE9D80-5F8D-8A47-AD11-25990CF48EE7}" destId="{9C8B8215-D13C-CA40-889A-C34613354D02}" srcOrd="0" destOrd="0" parTransId="{1029BF74-7CA6-B147-933B-5F0A513CA721}" sibTransId="{65362549-F521-B345-BFF0-A14C669386B1}"/>
     <dgm:cxn modelId="{52F78E5F-EEB7-664B-9D20-1BE91B87F3F7}" srcId="{64CE9D80-5F8D-8A47-AD11-25990CF48EE7}" destId="{DC0A212C-A33F-6E41-B202-D39315170082}" srcOrd="2" destOrd="0" parTransId="{35699270-49D7-B742-B00A-F0CDE109B9D1}" sibTransId="{1DBE605B-0325-AD40-A469-9AD20D6540AF}"/>
-    <dgm:cxn modelId="{96BA6E64-5912-2F48-B292-3C958F411006}" srcId="{64CE9D80-5F8D-8A47-AD11-25990CF48EE7}" destId="{9C8B8215-D13C-CA40-889A-C34613354D02}" srcOrd="0" destOrd="0" parTransId="{1029BF74-7CA6-B147-933B-5F0A513CA721}" sibTransId="{65362549-F521-B345-BFF0-A14C669386B1}"/>
+    <dgm:cxn modelId="{49E06D1A-1662-8048-A890-84B8853542A4}" type="presOf" srcId="{9C679208-F99A-0E49-89F6-525135327002}" destId="{016FBBD0-4935-024B-9949-5C9DAE09229E}" srcOrd="0" destOrd="0" presId="urn:microsoft.com/office/officeart/2005/8/layout/cycle3"/>
     <dgm:cxn modelId="{B1F44363-6215-7B41-B5D6-895EBD370099}" srcId="{64CE9D80-5F8D-8A47-AD11-25990CF48EE7}" destId="{9C679208-F99A-0E49-89F6-525135327002}" srcOrd="3" destOrd="0" parTransId="{123C8F17-1A45-0D42-8703-50850CC2332E}" sibTransId="{52EEFFE2-98D6-4644-B70C-8372D98C36C4}"/>
     <dgm:cxn modelId="{53ABEB96-EAA9-C543-BA38-3DFCFAAD6FC6}" type="presOf" srcId="{986F9BCB-EB92-714F-BCE2-5E5CA61830EA}" destId="{FA6C09FB-ED46-5541-B92C-5F6FF7938998}" srcOrd="0" destOrd="0" presId="urn:microsoft.com/office/officeart/2005/8/layout/cycle3"/>
-    <dgm:cxn modelId="{49E06D1A-1662-8048-A890-84B8853542A4}" type="presOf" srcId="{9C679208-F99A-0E49-89F6-525135327002}" destId="{016FBBD0-4935-024B-9949-5C9DAE09229E}" srcOrd="0" destOrd="0" presId="urn:microsoft.com/office/officeart/2005/8/layout/cycle3"/>
-    <dgm:cxn modelId="{9E61AA45-07FF-D644-A60C-67CAC443AE80}" type="presOf" srcId="{64CE9D80-5F8D-8A47-AD11-25990CF48EE7}" destId="{588784B2-E0AE-FD4D-A405-F11267A4FBA6}" srcOrd="0" destOrd="0" presId="urn:microsoft.com/office/officeart/2005/8/layout/cycle3"/>
+    <dgm:cxn modelId="{17BC82D6-32BA-2D4B-B103-567FF74CBF26}" type="presOf" srcId="{9C8B8215-D13C-CA40-889A-C34613354D02}" destId="{DE66BBE1-A1F4-CC47-958B-4602E0F65908}" srcOrd="0" destOrd="0" presId="urn:microsoft.com/office/officeart/2005/8/layout/cycle3"/>
     <dgm:cxn modelId="{4BB38FF6-0C54-BF4B-ABC9-59D526CA8A01}" type="presOf" srcId="{65362549-F521-B345-BFF0-A14C669386B1}" destId="{50BFB1CB-C90F-3041-80EA-6A8C1936CE7F}" srcOrd="0" destOrd="0" presId="urn:microsoft.com/office/officeart/2005/8/layout/cycle3"/>
-    <dgm:cxn modelId="{93FD232A-F3F9-F942-886D-72B700B5FDE7}" srcId="{64CE9D80-5F8D-8A47-AD11-25990CF48EE7}" destId="{986F9BCB-EB92-714F-BCE2-5E5CA61830EA}" srcOrd="1" destOrd="0" parTransId="{FCE15DAC-7C21-3146-B33B-565090AD3161}" sibTransId="{21843FB2-6972-D241-89AF-D3C7F8A34CEB}"/>
-    <dgm:cxn modelId="{17BC82D6-32BA-2D4B-B103-567FF74CBF26}" type="presOf" srcId="{9C8B8215-D13C-CA40-889A-C34613354D02}" destId="{DE66BBE1-A1F4-CC47-958B-4602E0F65908}" srcOrd="0" destOrd="0" presId="urn:microsoft.com/office/officeart/2005/8/layout/cycle3"/>
     <dgm:cxn modelId="{445B9847-458D-9347-8792-1CC3548D8668}" type="presParOf" srcId="{588784B2-E0AE-FD4D-A405-F11267A4FBA6}" destId="{5EDDA4D7-DA8A-AF42-BB75-FF82B2E7F98C}" srcOrd="0" destOrd="0" presId="urn:microsoft.com/office/officeart/2005/8/layout/cycle3"/>
     <dgm:cxn modelId="{43D291BB-3CA0-A149-B6E2-3ADAF67C7359}" type="presParOf" srcId="{5EDDA4D7-DA8A-AF42-BB75-FF82B2E7F98C}" destId="{DE66BBE1-A1F4-CC47-958B-4602E0F65908}" srcOrd="0" destOrd="0" presId="urn:microsoft.com/office/officeart/2005/8/layout/cycle3"/>
     <dgm:cxn modelId="{1477FAD8-B11B-6240-AC7C-39171A408539}" type="presParOf" srcId="{5EDDA4D7-DA8A-AF42-BB75-FF82B2E7F98C}" destId="{50BFB1CB-C90F-3041-80EA-6A8C1936CE7F}" srcOrd="1" destOrd="0" presId="urn:microsoft.com/office/officeart/2005/8/layout/cycle3"/>
@@ -4420,14 +4451,9 @@
           </a:pathLst>
         </a:custGeom>
         <a:noFill/>
-        <a:ln w="9525" cap="flat" cmpd="sng" algn="ctr">
+        <a:ln w="76200" cap="flat" cmpd="sng" algn="ctr">
           <a:solidFill>
-            <a:schemeClr val="accent1">
-              <a:hueOff val="0"/>
-              <a:satOff val="0"/>
-              <a:lumOff val="0"/>
-              <a:alphaOff val="0"/>
-            </a:schemeClr>
+            <a:schemeClr val="accent1"/>
           </a:solidFill>
           <a:prstDash val="solid"/>
           <a:tailEnd type="arrow"/>
@@ -4562,7 +4588,7 @@
       <dsp:spPr>
         <a:xfrm>
           <a:off x="2086663" y="2428365"/>
-          <a:ext cx="4970673" cy="898875"/>
+          <a:ext cx="4970673" cy="1025930"/>
         </a:xfrm>
         <a:custGeom>
           <a:avLst/>
@@ -4576,26 +4602,21 @@
                 <a:pt x="4970673" y="0"/>
               </a:moveTo>
               <a:lnTo>
-                <a:pt x="4970673" y="466537"/>
+                <a:pt x="4970673" y="530065"/>
               </a:lnTo>
               <a:lnTo>
-                <a:pt x="0" y="466537"/>
+                <a:pt x="0" y="530065"/>
               </a:lnTo>
               <a:lnTo>
-                <a:pt x="0" y="898875"/>
+                <a:pt x="0" y="1025930"/>
               </a:lnTo>
             </a:path>
           </a:pathLst>
         </a:custGeom>
         <a:noFill/>
-        <a:ln w="9525" cap="flat" cmpd="sng" algn="ctr">
+        <a:ln w="76200" cap="flat" cmpd="sng" algn="ctr">
           <a:solidFill>
-            <a:schemeClr val="accent1">
-              <a:hueOff val="0"/>
-              <a:satOff val="0"/>
-              <a:lumOff val="0"/>
-              <a:alphaOff val="0"/>
-            </a:schemeClr>
+            <a:schemeClr val="accent1"/>
           </a:solidFill>
           <a:prstDash val="solid"/>
           <a:tailEnd type="arrow"/>
@@ -4635,8 +4656,8 @@
         </a:p>
       </dsp:txBody>
       <dsp:txXfrm>
-        <a:off x="4445579" y="2873150"/>
-        <a:ext cx="252841" cy="9303"/>
+        <a:off x="4444957" y="2936678"/>
+        <a:ext cx="254085" cy="9303"/>
       </dsp:txXfrm>
     </dsp:sp>
     <dsp:sp modelId="{90C17530-C0B9-AE41-AB35-707FCF1F3D6F}">
@@ -4729,8 +4750,8 @@
       </dsp:nvSpPr>
       <dsp:spPr>
         <a:xfrm>
-          <a:off x="4105462" y="4572000"/>
-          <a:ext cx="888125" cy="106420"/>
+          <a:off x="4105462" y="4653335"/>
+          <a:ext cx="888125" cy="91440"/>
         </a:xfrm>
         <a:custGeom>
           <a:avLst/>
@@ -4741,29 +4762,24 @@
           <a:pathLst>
             <a:path>
               <a:moveTo>
-                <a:pt x="0" y="0"/>
+                <a:pt x="0" y="45720"/>
               </a:moveTo>
               <a:lnTo>
-                <a:pt x="461162" y="0"/>
+                <a:pt x="461162" y="45720"/>
               </a:lnTo>
               <a:lnTo>
-                <a:pt x="461162" y="106420"/>
+                <a:pt x="461162" y="50496"/>
               </a:lnTo>
               <a:lnTo>
-                <a:pt x="888125" y="106420"/>
+                <a:pt x="888125" y="50496"/>
               </a:lnTo>
             </a:path>
           </a:pathLst>
         </a:custGeom>
         <a:noFill/>
-        <a:ln w="9525" cap="flat" cmpd="sng" algn="ctr">
+        <a:ln w="76200" cap="flat" cmpd="sng" algn="ctr">
           <a:solidFill>
-            <a:schemeClr val="accent1">
-              <a:hueOff val="0"/>
-              <a:satOff val="0"/>
-              <a:lumOff val="0"/>
-              <a:alphaOff val="0"/>
-            </a:schemeClr>
+            <a:schemeClr val="accent1"/>
           </a:solidFill>
           <a:prstDash val="solid"/>
           <a:tailEnd type="arrow"/>
@@ -4803,8 +4819,8 @@
         </a:p>
       </dsp:txBody>
       <dsp:txXfrm>
-        <a:off x="4526403" y="4620558"/>
-        <a:ext cx="46243" cy="9303"/>
+        <a:off x="4526556" y="4694403"/>
+        <a:ext cx="45936" cy="9303"/>
       </dsp:txXfrm>
     </dsp:sp>
     <dsp:sp modelId="{D0DD2E67-431A-5340-802F-3C027CF0B76B}">
@@ -4814,7 +4830,7 @@
       </dsp:nvSpPr>
       <dsp:spPr>
         <a:xfrm>
-          <a:off x="66064" y="3359640"/>
+          <a:off x="66064" y="3486695"/>
           <a:ext cx="4041198" cy="2424718"/>
         </a:xfrm>
         <a:prstGeom prst="can">
@@ -4894,7 +4910,7 @@
         </a:p>
       </dsp:txBody>
       <dsp:txXfrm>
-        <a:off x="66064" y="3965820"/>
+        <a:off x="66064" y="4092875"/>
         <a:ext cx="4041198" cy="1515448"/>
       </dsp:txXfrm>
     </dsp:sp>
@@ -4905,8 +4921,8 @@
       </dsp:nvSpPr>
       <dsp:spPr>
         <a:xfrm>
-          <a:off x="7000867" y="5888980"/>
-          <a:ext cx="91440" cy="797900"/>
+          <a:off x="6996947" y="5914391"/>
+          <a:ext cx="91440" cy="772489"/>
         </a:xfrm>
         <a:custGeom>
           <a:avLst/>
@@ -4917,29 +4933,24 @@
           <a:pathLst>
             <a:path>
               <a:moveTo>
-                <a:pt x="45720" y="0"/>
+                <a:pt x="49639" y="0"/>
               </a:moveTo>
               <a:lnTo>
-                <a:pt x="45720" y="416050"/>
+                <a:pt x="49639" y="403344"/>
               </a:lnTo>
               <a:lnTo>
-                <a:pt x="67219" y="416050"/>
+                <a:pt x="45720" y="403344"/>
               </a:lnTo>
               <a:lnTo>
-                <a:pt x="67219" y="797900"/>
+                <a:pt x="45720" y="772489"/>
               </a:lnTo>
             </a:path>
           </a:pathLst>
         </a:custGeom>
         <a:noFill/>
-        <a:ln w="9525" cap="flat" cmpd="sng" algn="ctr">
+        <a:ln w="76200" cap="flat" cmpd="sng" algn="ctr">
           <a:solidFill>
-            <a:schemeClr val="accent1">
-              <a:hueOff val="0"/>
-              <a:satOff val="0"/>
-              <a:lumOff val="0"/>
-              <a:alphaOff val="0"/>
-            </a:schemeClr>
+            <a:schemeClr val="accent1"/>
           </a:solidFill>
           <a:prstDash val="solid"/>
           <a:tailEnd type="arrow"/>
@@ -4979,8 +4990,8 @@
         </a:p>
       </dsp:txBody>
       <dsp:txXfrm>
-        <a:off x="7025867" y="6283278"/>
-        <a:ext cx="41438" cy="9303"/>
+        <a:off x="7022589" y="6295984"/>
+        <a:ext cx="40154" cy="9303"/>
       </dsp:txXfrm>
     </dsp:sp>
     <dsp:sp modelId="{52152AA8-316C-604D-9019-721CD06FF857}">
@@ -4990,7 +5001,7 @@
       </dsp:nvSpPr>
       <dsp:spPr>
         <a:xfrm>
-          <a:off x="5025988" y="3466061"/>
+          <a:off x="5025988" y="3491472"/>
           <a:ext cx="4041198" cy="2424718"/>
         </a:xfrm>
         <a:prstGeom prst="flowChartInternalStorage">
@@ -5062,7 +5073,7 @@
         </a:p>
       </dsp:txBody>
       <dsp:txXfrm>
-        <a:off x="5531138" y="3769151"/>
+        <a:off x="5531138" y="3794562"/>
         <a:ext cx="3536048" cy="2121628"/>
       </dsp:txXfrm>
     </dsp:sp>
@@ -5073,7 +5084,7 @@
       </dsp:nvSpPr>
       <dsp:spPr>
         <a:xfrm>
-          <a:off x="5047487" y="6719281"/>
+          <a:off x="5022068" y="6719281"/>
           <a:ext cx="4041198" cy="2424718"/>
         </a:xfrm>
         <a:prstGeom prst="flowChartInternalStorage">
@@ -5145,7 +5156,7 @@
         </a:p>
       </dsp:txBody>
       <dsp:txXfrm>
-        <a:off x="5552637" y="7022371"/>
+        <a:off x="5527218" y="7022371"/>
         <a:ext cx="3536048" cy="2121628"/>
       </dsp:txXfrm>
     </dsp:sp>
@@ -5273,7 +5284,7 @@
             </a:spcAft>
           </a:pPr>
           <a:r>
-            <a:rPr lang="en-US" sz="4400" kern="1200" dirty="0" smtClean="0">
+            <a:rPr lang="en-US" sz="4400" kern="1200" smtClean="0">
               <a:solidFill>
                 <a:srgbClr val="FFFF00"/>
               </a:solidFill>
@@ -5281,7 +5292,7 @@
             <a:t>Loop</a:t>
           </a:r>
           <a:r>
-            <a:rPr lang="en-US" sz="4400" kern="1200" dirty="0" smtClean="0"/>
+            <a:rPr lang="en-US" sz="4400" kern="1200" smtClean="0"/>
             <a:t> over N genes</a:t>
           </a:r>
           <a:endParaRPr lang="en-US" sz="4400" kern="1200" dirty="0"/>
@@ -5358,7 +5369,7 @@
             </a:spcAft>
           </a:pPr>
           <a:r>
-            <a:rPr lang="en-US" sz="4400" kern="1200" dirty="0" smtClean="0">
+            <a:rPr lang="en-US" sz="4400" kern="1200" smtClean="0">
               <a:solidFill>
                 <a:srgbClr val="FFFF00"/>
               </a:solidFill>
@@ -5366,7 +5377,7 @@
             <a:t>Decompress</a:t>
           </a:r>
           <a:r>
-            <a:rPr lang="en-US" sz="4400" kern="1200" dirty="0" smtClean="0"/>
+            <a:rPr lang="en-US" sz="4400" kern="1200" smtClean="0"/>
             <a:t> Range n</a:t>
           </a:r>
           <a:endParaRPr lang="en-US" sz="4400" kern="1200" dirty="0"/>
@@ -11502,7 +11513,7 @@
             <a:fld id="{A5F985E0-AC7B-3D4C-A5BD-9CFE8A2EAC6A}" type="datetimeFigureOut">
               <a:rPr lang="en-US" smtClean="0"/>
               <a:pPr/>
-              <a:t>10/9/17</a:t>
+              <a:t>10/10/17</a:t>
             </a:fld>
             <a:endParaRPr lang="en-US" dirty="0"/>
           </a:p>
@@ -12054,7 +12065,7 @@
             <a:fld id="{845C0A24-95E3-E24B-9E79-9271EC8244CA}" type="datetimeFigureOut">
               <a:rPr lang="en-US" smtClean="0"/>
               <a:pPr/>
-              <a:t>10/9/17</a:t>
+              <a:t>10/10/17</a:t>
             </a:fld>
             <a:endParaRPr lang="en-US" dirty="0"/>
           </a:p>
@@ -12221,7 +12232,7 @@
             <a:fld id="{845C0A24-95E3-E24B-9E79-9271EC8244CA}" type="datetimeFigureOut">
               <a:rPr lang="en-US" smtClean="0"/>
               <a:pPr/>
-              <a:t>10/9/17</a:t>
+              <a:t>10/10/17</a:t>
             </a:fld>
             <a:endParaRPr lang="en-US" dirty="0"/>
           </a:p>
@@ -12398,7 +12409,7 @@
             <a:fld id="{845C0A24-95E3-E24B-9E79-9271EC8244CA}" type="datetimeFigureOut">
               <a:rPr lang="en-US" smtClean="0"/>
               <a:pPr/>
-              <a:t>10/9/17</a:t>
+              <a:t>10/10/17</a:t>
             </a:fld>
             <a:endParaRPr lang="en-US" dirty="0"/>
           </a:p>
@@ -12565,7 +12576,7 @@
             <a:fld id="{845C0A24-95E3-E24B-9E79-9271EC8244CA}" type="datetimeFigureOut">
               <a:rPr lang="en-US" smtClean="0"/>
               <a:pPr/>
-              <a:t>10/9/17</a:t>
+              <a:t>10/10/17</a:t>
             </a:fld>
             <a:endParaRPr lang="en-US" dirty="0"/>
           </a:p>
@@ -12808,7 +12819,7 @@
             <a:fld id="{845C0A24-95E3-E24B-9E79-9271EC8244CA}" type="datetimeFigureOut">
               <a:rPr lang="en-US" smtClean="0"/>
               <a:pPr/>
-              <a:t>10/9/17</a:t>
+              <a:t>10/10/17</a:t>
             </a:fld>
             <a:endParaRPr lang="en-US" dirty="0"/>
           </a:p>
@@ -13093,7 +13104,7 @@
             <a:fld id="{845C0A24-95E3-E24B-9E79-9271EC8244CA}" type="datetimeFigureOut">
               <a:rPr lang="en-US" smtClean="0"/>
               <a:pPr/>
-              <a:t>10/9/17</a:t>
+              <a:t>10/10/17</a:t>
             </a:fld>
             <a:endParaRPr lang="en-US" dirty="0"/>
           </a:p>
@@ -13512,7 +13523,7 @@
             <a:fld id="{845C0A24-95E3-E24B-9E79-9271EC8244CA}" type="datetimeFigureOut">
               <a:rPr lang="en-US" smtClean="0"/>
               <a:pPr/>
-              <a:t>10/9/17</a:t>
+              <a:t>10/10/17</a:t>
             </a:fld>
             <a:endParaRPr lang="en-US" dirty="0"/>
           </a:p>
@@ -13627,7 +13638,7 @@
             <a:fld id="{845C0A24-95E3-E24B-9E79-9271EC8244CA}" type="datetimeFigureOut">
               <a:rPr lang="en-US" smtClean="0"/>
               <a:pPr/>
-              <a:t>10/9/17</a:t>
+              <a:t>10/10/17</a:t>
             </a:fld>
             <a:endParaRPr lang="en-US" dirty="0"/>
           </a:p>
@@ -13719,7 +13730,7 @@
             <a:fld id="{845C0A24-95E3-E24B-9E79-9271EC8244CA}" type="datetimeFigureOut">
               <a:rPr lang="en-US" smtClean="0"/>
               <a:pPr/>
-              <a:t>10/9/17</a:t>
+              <a:t>10/10/17</a:t>
             </a:fld>
             <a:endParaRPr lang="en-US" dirty="0"/>
           </a:p>
@@ -13993,7 +14004,7 @@
             <a:fld id="{845C0A24-95E3-E24B-9E79-9271EC8244CA}" type="datetimeFigureOut">
               <a:rPr lang="en-US" smtClean="0"/>
               <a:pPr/>
-              <a:t>10/9/17</a:t>
+              <a:t>10/10/17</a:t>
             </a:fld>
             <a:endParaRPr lang="en-US" dirty="0"/>
           </a:p>
@@ -14243,7 +14254,7 @@
             <a:fld id="{845C0A24-95E3-E24B-9E79-9271EC8244CA}" type="datetimeFigureOut">
               <a:rPr lang="en-US" smtClean="0"/>
               <a:pPr/>
-              <a:t>10/9/17</a:t>
+              <a:t>10/10/17</a:t>
             </a:fld>
             <a:endParaRPr lang="en-US" dirty="0"/>
           </a:p>
@@ -14453,7 +14464,7 @@
             <a:fld id="{845C0A24-95E3-E24B-9E79-9271EC8244CA}" type="datetimeFigureOut">
               <a:rPr lang="en-US" smtClean="0"/>
               <a:pPr/>
-              <a:t>10/9/17</a:t>
+              <a:t>10/10/17</a:t>
             </a:fld>
             <a:endParaRPr lang="en-US" dirty="0"/>
           </a:p>
@@ -14834,7 +14845,7 @@
         </p:nvSpPr>
         <p:spPr bwMode="auto">
           <a:xfrm>
-            <a:off x="11146545" y="6641901"/>
+            <a:off x="11146545" y="6311701"/>
             <a:ext cx="9144000" cy="7478970"/>
           </a:xfrm>
           <a:prstGeom prst="rect">
@@ -15014,10 +15025,20 @@
                   </a:schemeClr>
                 </a:solidFill>
               </a:rPr>
-              <a:t>Daniel E. Weeks</a:t>
-            </a:r>
-            <a:r>
-              <a:rPr lang="en-US" sz="4400" baseline="30000" dirty="0">
+              <a:t>Daniel E. </a:t>
+            </a:r>
+            <a:r>
+              <a:rPr lang="en-US" sz="4400" dirty="0" smtClean="0">
+                <a:solidFill>
+                  <a:schemeClr val="accent1">
+                    <a:lumMod val="75000"/>
+                  </a:schemeClr>
+                </a:solidFill>
+              </a:rPr>
+              <a:t>Weeks</a:t>
+            </a:r>
+            <a:r>
+              <a:rPr lang="en-US" sz="4400" baseline="30000" dirty="0" smtClean="0">
                 <a:solidFill>
                   <a:schemeClr val="accent1">
                     <a:lumMod val="75000"/>
@@ -15027,16 +15048,6 @@
               <a:t>1,2</a:t>
             </a:r>
             <a:r>
-              <a:rPr lang="en-US" sz="4400" dirty="0">
-                <a:solidFill>
-                  <a:schemeClr val="accent1">
-                    <a:lumMod val="75000"/>
-                  </a:schemeClr>
-                </a:solidFill>
-              </a:rPr>
-              <a:t> </a:t>
-            </a:r>
-            <a:r>
               <a:rPr lang="en-US" sz="4400" dirty="0" smtClean="0">
                 <a:solidFill>
                   <a:schemeClr val="accent1">
@@ -15044,7 +15055,7 @@
                   </a:schemeClr>
                 </a:solidFill>
               </a:rPr>
-              <a:t>,Robert V. Baron</a:t>
+              <a:t>, Robert V. Baron</a:t>
             </a:r>
             <a:r>
               <a:rPr lang="en-US" sz="4400" baseline="30000" dirty="0" smtClean="0">
@@ -15136,7 +15147,7 @@
         </p:nvSpPr>
         <p:spPr>
           <a:xfrm flipH="1">
-            <a:off x="840785" y="6649144"/>
+            <a:off x="840785" y="6318944"/>
             <a:ext cx="9144000" cy="3046988"/>
           </a:xfrm>
           <a:prstGeom prst="rect">
@@ -15167,14 +15178,6 @@
                 </a:solidFill>
               </a:rPr>
               <a:t>Data reformatting tool in C++ for genetic analysis</a:t>
-            </a:r>
-            <a:r>
-              <a:rPr lang="en-US" sz="4800" dirty="0" smtClean="0">
-                <a:solidFill>
-                  <a:srgbClr val="000000"/>
-                </a:solidFill>
-              </a:rPr>
-              <a:t>. </a:t>
             </a:r>
             <a:r>
               <a:rPr lang="en-US" sz="4800" baseline="30000" dirty="0" smtClean="0">
@@ -15218,7 +15221,7 @@
         </p:blipFill>
         <p:spPr>
           <a:xfrm>
-            <a:off x="301780" y="295440"/>
+            <a:off x="301780" y="143040"/>
             <a:ext cx="4812580" cy="5072459"/>
           </a:xfrm>
           <a:prstGeom prst="rect">
@@ -15234,8 +15237,8 @@
         </p:nvSpPr>
         <p:spPr>
           <a:xfrm>
-            <a:off x="301778" y="35508892"/>
-            <a:ext cx="30381422" cy="4770537"/>
+            <a:off x="301778" y="34873892"/>
+            <a:ext cx="30584622" cy="5632311"/>
           </a:xfrm>
           <a:prstGeom prst="rect">
             <a:avLst/>
@@ -15263,38 +15266,38 @@
               <a:buAutoNum type="arabicPeriod"/>
             </a:pPr>
             <a:r>
-              <a:rPr lang="en-US" sz="4000" dirty="0" smtClean="0"/>
+              <a:rPr lang="en-US" sz="3600" dirty="0" smtClean="0"/>
               <a:t>Baron et al. (2014) </a:t>
             </a:r>
             <a:r>
-              <a:rPr lang="en-US" sz="4000" dirty="0"/>
+              <a:rPr lang="en-US" sz="3600" dirty="0"/>
               <a:t>Mega2: validated data-reformatting for linkage and association </a:t>
             </a:r>
             <a:r>
-              <a:rPr lang="en-US" sz="4000" dirty="0" smtClean="0"/>
+              <a:rPr lang="en-US" sz="3600" dirty="0" smtClean="0"/>
               <a:t>analyses. </a:t>
             </a:r>
             <a:r>
-              <a:rPr lang="fr-FR" sz="4000" dirty="0"/>
+              <a:rPr lang="fr-FR" sz="3600" dirty="0"/>
               <a:t>Source Code </a:t>
             </a:r>
             <a:r>
-              <a:rPr lang="fr-FR" sz="4000" dirty="0" err="1"/>
+              <a:rPr lang="fr-FR" sz="3600" dirty="0" err="1"/>
               <a:t>Biol</a:t>
             </a:r>
             <a:r>
-              <a:rPr lang="fr-FR" sz="4000" dirty="0"/>
+              <a:rPr lang="fr-FR" sz="3600" dirty="0"/>
               <a:t> Med. 2014 </a:t>
             </a:r>
             <a:r>
-              <a:rPr lang="fr-FR" sz="4000" dirty="0" err="1"/>
+              <a:rPr lang="fr-FR" sz="3600" dirty="0" err="1"/>
               <a:t>Dec</a:t>
             </a:r>
             <a:r>
-              <a:rPr lang="fr-FR" sz="4000" dirty="0"/>
+              <a:rPr lang="fr-FR" sz="3600" dirty="0"/>
               <a:t> 5;9(1):26.</a:t>
             </a:r>
-            <a:endParaRPr lang="en-US" sz="4000" dirty="0" smtClean="0"/>
+            <a:endParaRPr lang="en-US" sz="3600" dirty="0" smtClean="0"/>
           </a:p>
           <a:p>
             <a:pPr marL="742950" indent="-742950">
@@ -15302,16 +15305,12 @@
               <a:buAutoNum type="arabicPeriod"/>
             </a:pPr>
             <a:r>
-              <a:rPr lang="en-US" sz="4000" dirty="0" err="1" smtClean="0"/>
+              <a:rPr lang="en-US" sz="3600" dirty="0" err="1" smtClean="0"/>
               <a:t>Mukhopadhyay</a:t>
             </a:r>
             <a:r>
-              <a:rPr lang="en-US" sz="4000" dirty="0" smtClean="0"/>
-              <a:t> et al. (2005) Mega2: data-handling for facilitating genetic linkage and association analyses. Bioinformatics 21:2556-255</a:t>
-            </a:r>
-            <a:r>
-              <a:rPr lang="en-US" sz="4000" dirty="0" smtClean="0"/>
-              <a:t>.</a:t>
+              <a:rPr lang="en-US" sz="3600" dirty="0" smtClean="0"/>
+              <a:t> et al. (2005) Mega2: data-handling for facilitating genetic linkage and association analyses. Bioinformatics 21:2556-255.</a:t>
             </a:r>
           </a:p>
           <a:p>
@@ -15320,26 +15319,17 @@
               <a:buAutoNum type="arabicPeriod"/>
             </a:pPr>
             <a:r>
-              <a:rPr lang="en-US" sz="4000" dirty="0" err="1" smtClean="0"/>
+              <a:rPr lang="en-US" sz="3600" dirty="0" err="1" smtClean="0"/>
               <a:t>Schaid</a:t>
             </a:r>
             <a:r>
-              <a:rPr lang="en-US" sz="4000" dirty="0"/>
+              <a:rPr lang="en-US" sz="3600" dirty="0"/>
               <a:t> </a:t>
             </a:r>
             <a:r>
-              <a:rPr lang="en-US" sz="4000" dirty="0" smtClean="0"/>
-              <a:t>et al. (2013) Multiple genetic variant association testing by collapsing and kernel methods with pedigree or population structured data. Genet </a:t>
-            </a:r>
-            <a:r>
-              <a:rPr lang="en-US" sz="4000" dirty="0" err="1" smtClean="0"/>
-              <a:t>Epidimiol</a:t>
-            </a:r>
-            <a:r>
-              <a:rPr lang="en-US" sz="4000" dirty="0" smtClean="0"/>
-              <a:t> 37(5):408-418.</a:t>
-            </a:r>
-            <a:endParaRPr lang="en-US" sz="4000" dirty="0" smtClean="0"/>
+              <a:rPr lang="en-US" sz="3600" dirty="0" smtClean="0"/>
+              <a:t>et al. (2013) Multiple genetic variant association testing by collapsing and kernel methods with pedigree or population structured data. Genet Epidemiology 37(5):408-418.</a:t>
+            </a:r>
           </a:p>
           <a:p>
             <a:pPr marL="742950" indent="-742950">
@@ -15347,23 +15337,19 @@
               <a:buAutoNum type="arabicPeriod"/>
             </a:pPr>
             <a:r>
-              <a:rPr lang="en-US" sz="4000" dirty="0" err="1" smtClean="0"/>
+              <a:rPr lang="en-US" sz="3600" dirty="0" err="1" smtClean="0"/>
               <a:t>Aulchenko</a:t>
             </a:r>
             <a:r>
-              <a:rPr lang="en-US" sz="4000" dirty="0" smtClean="0"/>
-              <a:t> </a:t>
-            </a:r>
-            <a:r>
-              <a:rPr lang="en-US" sz="4000" dirty="0" smtClean="0"/>
-              <a:t>YS et al. (2007) </a:t>
-            </a:r>
-            <a:r>
-              <a:rPr lang="en-US" sz="4000" dirty="0" err="1" smtClean="0"/>
+              <a:rPr lang="en-US" sz="3600" dirty="0" smtClean="0"/>
+              <a:t> YS et al. (2007) </a:t>
+            </a:r>
+            <a:r>
+              <a:rPr lang="en-US" sz="3600" dirty="0" err="1" smtClean="0"/>
               <a:t>GenABEL</a:t>
             </a:r>
             <a:r>
-              <a:rPr lang="en-US" sz="4000" dirty="0" smtClean="0"/>
+              <a:rPr lang="en-US" sz="3600" dirty="0" smtClean="0"/>
               <a:t>: an R library for genome-wide association analysis. Bioinformatics. 2007 May 15;23(10):1294-6.</a:t>
             </a:r>
           </a:p>
@@ -15372,6 +15358,35 @@
               <a:buFont typeface="+mj-lt"/>
               <a:buAutoNum type="arabicPeriod"/>
             </a:pPr>
+            <a:r>
+              <a:rPr lang="en-US" sz="3600" dirty="0" smtClean="0"/>
+              <a:t>Wu MC et al. </a:t>
+            </a:r>
+            <a:r>
+              <a:rPr lang="en-US" sz="3600" dirty="0"/>
+              <a:t>(2011) Rare Variant </a:t>
+            </a:r>
+            <a:r>
+              <a:rPr lang="en-US" sz="3600" dirty="0" smtClean="0"/>
+              <a:t>Association </a:t>
+            </a:r>
+            <a:r>
+              <a:rPr lang="en-US" sz="3600" dirty="0"/>
+              <a:t>Testing for Sequencing Data Using the Sequence Kernel Association Test (SKAT). </a:t>
+            </a:r>
+            <a:r>
+              <a:rPr lang="en-US" sz="3600" dirty="0" smtClean="0"/>
+              <a:t>Am J Hum Genet, </a:t>
+            </a:r>
+            <a:r>
+              <a:rPr lang="en-US" sz="3600" dirty="0"/>
+              <a:t>89, 82-93. </a:t>
+            </a:r>
+          </a:p>
+          <a:p>
+            <a:endParaRPr lang="en-US" sz="4000" dirty="0" smtClean="0"/>
+          </a:p>
+          <a:p>
             <a:endParaRPr lang="en-US" sz="5200" dirty="0" smtClean="0"/>
           </a:p>
         </p:txBody>
@@ -15384,7 +15399,7 @@
         </p:nvSpPr>
         <p:spPr>
           <a:xfrm>
-            <a:off x="301780" y="39446200"/>
+            <a:off x="301780" y="39141400"/>
             <a:ext cx="18474930" cy="707886"/>
           </a:xfrm>
           <a:prstGeom prst="rect">
@@ -15408,7 +15423,7 @@
             </a:r>
             <a:r>
               <a:rPr lang="en-US" sz="4000" dirty="0" smtClean="0"/>
-              <a:t>This work was supported by NIH grant R01 GM076667 (PI: Weeks) )</a:t>
+              <a:t>This work was supported by NIH grant R01 GM076667 (PI: Weeks)</a:t>
             </a:r>
             <a:endParaRPr lang="en-US" sz="4000" dirty="0"/>
           </a:p>
@@ -15422,7 +15437,7 @@
         </p:nvSpPr>
         <p:spPr>
           <a:xfrm>
-            <a:off x="5788525" y="34371410"/>
+            <a:off x="5432925" y="34040262"/>
             <a:ext cx="2316660" cy="707886"/>
           </a:xfrm>
           <a:prstGeom prst="rect">
@@ -15438,11 +15453,7 @@
           <a:p>
             <a:r>
               <a:rPr lang="en-US" sz="4000" dirty="0" smtClean="0"/>
-              <a:t>Mega2R-</a:t>
-            </a:r>
-            <a:r>
-              <a:rPr lang="en-US" sz="4000" dirty="0" smtClean="0"/>
-              <a:t>&gt;</a:t>
+              <a:t>Mega2R-&gt;</a:t>
             </a:r>
           </a:p>
         </p:txBody>
@@ -15456,13 +15467,13 @@
           <p:nvPr>
             <p:extLst>
               <p:ext uri="{D42A27DB-BD31-4B8C-83A1-F6EECF244321}">
-                <p14:modId xmlns:p14="http://schemas.microsoft.com/office/powerpoint/2010/main" val="2100559740"/>
+                <p14:modId xmlns:p14="http://schemas.microsoft.com/office/powerpoint/2010/main" val="1123370588"/>
               </p:ext>
             </p:extLst>
           </p:nvPr>
         </p:nvGraphicFramePr>
         <p:xfrm>
-          <a:off x="840785" y="9677975"/>
+          <a:off x="840785" y="9347775"/>
           <a:ext cx="9144000" cy="2468880"/>
         </p:xfrm>
         <a:graphic>
@@ -15589,8 +15600,8 @@
         </p:nvSpPr>
         <p:spPr>
           <a:xfrm>
-            <a:off x="840788" y="21377704"/>
-            <a:ext cx="9144000" cy="12649615"/>
+            <a:off x="840788" y="21047504"/>
+            <a:ext cx="9144000" cy="11849396"/>
           </a:xfrm>
           <a:prstGeom prst="rect">
             <a:avLst/>
@@ -15796,18 +15807,18 @@
           </a:p>
           <a:p>
             <a:r>
-              <a:rPr lang="en-US" sz="4800" dirty="0" smtClean="0">
+              <a:rPr lang="en-US" sz="4400" dirty="0" smtClean="0">
                 <a:hlinkClick r:id="rId4"/>
               </a:rPr>
               <a:t>https:</a:t>
             </a:r>
             <a:r>
-              <a:rPr lang="en-US" sz="4800" dirty="0">
+              <a:rPr lang="en-US" sz="4400" dirty="0">
                 <a:hlinkClick r:id="rId4"/>
               </a:rPr>
               <a:t>//watson.hgen.pitt.edu/register/</a:t>
             </a:r>
-            <a:endParaRPr lang="en-US" sz="4800" dirty="0"/>
+            <a:endParaRPr lang="en-US" sz="4400" dirty="0"/>
           </a:p>
         </p:txBody>
       </p:sp>
@@ -15819,7 +15830,7 @@
         </p:nvSpPr>
         <p:spPr>
           <a:xfrm>
-            <a:off x="840785" y="12538504"/>
+            <a:off x="840785" y="12208304"/>
             <a:ext cx="9144000" cy="1569660"/>
           </a:xfrm>
           <a:prstGeom prst="rect">
@@ -15866,13 +15877,13 @@
           <p:nvPr>
             <p:extLst>
               <p:ext uri="{D42A27DB-BD31-4B8C-83A1-F6EECF244321}">
-                <p14:modId xmlns:p14="http://schemas.microsoft.com/office/powerpoint/2010/main" val="278939953"/>
+                <p14:modId xmlns:p14="http://schemas.microsoft.com/office/powerpoint/2010/main" val="3768370310"/>
               </p:ext>
             </p:extLst>
           </p:nvPr>
         </p:nvGraphicFramePr>
         <p:xfrm>
-          <a:off x="840787" y="14185123"/>
+          <a:off x="840787" y="13854923"/>
           <a:ext cx="9144000" cy="6639576"/>
         </p:xfrm>
         <a:graphic>
@@ -16151,7 +16162,7 @@
         </p:nvSpPr>
         <p:spPr>
           <a:xfrm>
-            <a:off x="21009087" y="16853028"/>
+            <a:off x="21009087" y="16522828"/>
             <a:ext cx="9144000" cy="6001643"/>
           </a:xfrm>
           <a:prstGeom prst="rect">
@@ -16236,13 +16247,13 @@
           <p:nvPr>
             <p:extLst>
               <p:ext uri="{D42A27DB-BD31-4B8C-83A1-F6EECF244321}">
-                <p14:modId xmlns:p14="http://schemas.microsoft.com/office/powerpoint/2010/main" val="1345163673"/>
+                <p14:modId xmlns:p14="http://schemas.microsoft.com/office/powerpoint/2010/main" val="4160846903"/>
               </p:ext>
             </p:extLst>
           </p:nvPr>
         </p:nvGraphicFramePr>
         <p:xfrm>
-          <a:off x="11146544" y="15322742"/>
+          <a:off x="11146544" y="14382942"/>
           <a:ext cx="9144000" cy="9144000"/>
         </p:xfrm>
         <a:graphic>
@@ -16259,7 +16270,7 @@
         </p:nvSpPr>
         <p:spPr>
           <a:xfrm>
-            <a:off x="11146544" y="24466742"/>
+            <a:off x="11146544" y="24136542"/>
             <a:ext cx="9144000" cy="10433624"/>
           </a:xfrm>
           <a:prstGeom prst="rect">
@@ -16375,7 +16386,7 @@
         </p:nvSpPr>
         <p:spPr>
           <a:xfrm>
-            <a:off x="10617200" y="5464667"/>
+            <a:off x="10617200" y="5134467"/>
             <a:ext cx="19611446" cy="1200329"/>
           </a:xfrm>
           <a:prstGeom prst="rect">
@@ -16426,13 +16437,13 @@
           <p:nvPr>
             <p:extLst>
               <p:ext uri="{D42A27DB-BD31-4B8C-83A1-F6EECF244321}">
-                <p14:modId xmlns:p14="http://schemas.microsoft.com/office/powerpoint/2010/main" val="3907626524"/>
+                <p14:modId xmlns:p14="http://schemas.microsoft.com/office/powerpoint/2010/main" val="1767650188"/>
               </p:ext>
             </p:extLst>
           </p:nvPr>
         </p:nvGraphicFramePr>
         <p:xfrm>
-          <a:off x="21084646" y="21993748"/>
+          <a:off x="21084646" y="21663548"/>
           <a:ext cx="9144000" cy="8788400"/>
         </p:xfrm>
         <a:graphic>
@@ -16448,13 +16459,13 @@
           <p:nvPr>
             <p:extLst>
               <p:ext uri="{D42A27DB-BD31-4B8C-83A1-F6EECF244321}">
-                <p14:modId xmlns:p14="http://schemas.microsoft.com/office/powerpoint/2010/main" val="544492472"/>
+                <p14:modId xmlns:p14="http://schemas.microsoft.com/office/powerpoint/2010/main" val="3416379830"/>
               </p:ext>
             </p:extLst>
           </p:nvPr>
         </p:nvGraphicFramePr>
         <p:xfrm>
-          <a:off x="21084646" y="7571466"/>
+          <a:off x="21084646" y="7241266"/>
           <a:ext cx="3657600" cy="9144000"/>
         </p:xfrm>
         <a:graphic>
@@ -16470,13 +16481,13 @@
           <p:nvPr>
             <p:extLst>
               <p:ext uri="{D42A27DB-BD31-4B8C-83A1-F6EECF244321}">
-                <p14:modId xmlns:p14="http://schemas.microsoft.com/office/powerpoint/2010/main" val="1826584303"/>
+                <p14:modId xmlns:p14="http://schemas.microsoft.com/office/powerpoint/2010/main" val="3908450759"/>
               </p:ext>
             </p:extLst>
           </p:nvPr>
         </p:nvGraphicFramePr>
         <p:xfrm>
-          <a:off x="26576339" y="7574855"/>
+          <a:off x="26576339" y="7244655"/>
           <a:ext cx="3657600" cy="9144000"/>
         </p:xfrm>
         <a:graphic>
@@ -16493,8 +16504,8 @@
         </p:nvSpPr>
         <p:spPr>
           <a:xfrm>
-            <a:off x="21089939" y="30094668"/>
-            <a:ext cx="9144000" cy="4524315"/>
+            <a:off x="21089939" y="29764468"/>
+            <a:ext cx="9144000" cy="5262979"/>
           </a:xfrm>
           <a:prstGeom prst="rect">
             <a:avLst/>
@@ -16595,7 +16606,33 @@
               </a:rPr>
               <a:t>    Mega2VCF</a:t>
             </a:r>
-            <a:endParaRPr lang="en-US" sz="4800" dirty="0">
+          </a:p>
+          <a:p>
+            <a:r>
+              <a:rPr lang="en-US" sz="4800" dirty="0">
+                <a:solidFill>
+                  <a:srgbClr val="000000"/>
+                </a:solidFill>
+              </a:rPr>
+              <a:t> </a:t>
+            </a:r>
+            <a:r>
+              <a:rPr lang="en-US" sz="4800" dirty="0" smtClean="0">
+                <a:solidFill>
+                  <a:srgbClr val="000000"/>
+                </a:solidFill>
+              </a:rPr>
+              <a:t>    Mega2SKAT</a:t>
+            </a:r>
+            <a:r>
+              <a:rPr lang="en-US" sz="4800" baseline="30000" dirty="0" smtClean="0">
+                <a:solidFill>
+                  <a:srgbClr val="000000"/>
+                </a:solidFill>
+              </a:rPr>
+              <a:t>5</a:t>
+            </a:r>
+            <a:endParaRPr lang="en-US" sz="4800" baseline="30000" dirty="0">
               <a:solidFill>
                 <a:srgbClr val="000000"/>
               </a:solidFill>
@@ -16648,7 +16685,6 @@
               <a:rPr lang="en-US" sz="4800" dirty="0" smtClean="0"/>
               <a:t>CRAN </a:t>
             </a:r>
-            <a:endParaRPr lang="en-US" sz="4800" dirty="0"/>
           </a:p>
         </p:txBody>
       </p:sp>
@@ -16660,7 +16696,7 @@
         </p:nvSpPr>
         <p:spPr>
           <a:xfrm>
-            <a:off x="840788" y="5464667"/>
+            <a:off x="840788" y="5134467"/>
             <a:ext cx="9776412" cy="1200329"/>
           </a:xfrm>
           <a:prstGeom prst="rect">
@@ -16712,7 +16748,7 @@
         </p:nvSpPr>
         <p:spPr>
           <a:xfrm>
-            <a:off x="21009087" y="6664996"/>
+            <a:off x="21009087" y="6334796"/>
             <a:ext cx="9144000" cy="830997"/>
           </a:xfrm>
           <a:prstGeom prst="rect">
@@ -16750,8 +16786,8 @@
         </p:nvCxnSpPr>
         <p:spPr>
           <a:xfrm>
-            <a:off x="10617200" y="5464667"/>
-            <a:ext cx="0" cy="30649162"/>
+            <a:off x="10617200" y="5134467"/>
+            <a:ext cx="0" cy="29892980"/>
           </a:xfrm>
           <a:prstGeom prst="line">
             <a:avLst/>
@@ -16780,7 +16816,7 @@
         </p:nvGrpSpPr>
         <p:grpSpPr>
           <a:xfrm rot="16200000">
-            <a:off x="25187275" y="11756759"/>
+            <a:off x="25187275" y="11426559"/>
             <a:ext cx="1028700" cy="857250"/>
             <a:chOff x="1314449" y="2428875"/>
             <a:chExt cx="1028700" cy="857250"/>
@@ -16909,7 +16945,7 @@
         </p:blipFill>
         <p:spPr>
           <a:xfrm flipH="1">
-            <a:off x="8105185" y="33354154"/>
+            <a:off x="7749585" y="32956662"/>
             <a:ext cx="2286000" cy="2286000"/>
           </a:xfrm>
           <a:prstGeom prst="rect">
@@ -16938,7 +16974,7 @@
         </p:blipFill>
         <p:spPr>
           <a:xfrm>
-            <a:off x="3456357" y="33286862"/>
+            <a:off x="3100757" y="32956662"/>
             <a:ext cx="2286000" cy="2286000"/>
           </a:xfrm>
           <a:prstGeom prst="rect">
@@ -16954,7 +16990,7 @@
         </p:nvSpPr>
         <p:spPr>
           <a:xfrm>
-            <a:off x="1377509" y="34370462"/>
+            <a:off x="1021909" y="34040262"/>
             <a:ext cx="2038138" cy="707886"/>
           </a:xfrm>
           <a:prstGeom prst="rect">
@@ -16970,12 +17006,52 @@
           <a:p>
             <a:r>
               <a:rPr lang="en-US" sz="4000" dirty="0" smtClean="0"/>
-              <a:t>Mega2-</a:t>
-            </a:r>
-            <a:r>
-              <a:rPr lang="en-US" sz="4000" dirty="0" smtClean="0"/>
-              <a:t>&gt;</a:t>
-            </a:r>
+              <a:t>Mega2-&gt;</a:t>
+            </a:r>
+          </a:p>
+        </p:txBody>
+      </p:sp>
+      <p:sp>
+        <p:nvSpPr>
+          <p:cNvPr id="21" name="TextBox 20"/>
+          <p:cNvSpPr txBox="1"/>
+          <p:nvPr/>
+        </p:nvSpPr>
+        <p:spPr>
+          <a:xfrm>
+            <a:off x="13944600" y="34824348"/>
+            <a:ext cx="10802957" cy="1446550"/>
+          </a:xfrm>
+          <a:prstGeom prst="rect">
+            <a:avLst/>
+          </a:prstGeom>
+          <a:noFill/>
+        </p:spPr>
+        <p:txBody>
+          <a:bodyPr wrap="none" rtlCol="0">
+            <a:spAutoFit/>
+          </a:bodyPr>
+          <a:lstStyle/>
+          <a:p>
+            <a:r>
+              <a:rPr lang="en-US" sz="4400" dirty="0">
+                <a:hlinkClick r:id="rId27"/>
+              </a:rPr>
+              <a:t>https://watson.hgen.pitt.edu/mega2/mega2r</a:t>
+            </a:r>
+            <a:r>
+              <a:rPr lang="en-US" sz="4400" dirty="0" smtClean="0">
+                <a:hlinkClick r:id="rId27"/>
+              </a:rPr>
+              <a:t>/</a:t>
+            </a:r>
+            <a:r>
+              <a:rPr lang="en-US" sz="4400" dirty="0" smtClean="0"/>
+              <a:t> </a:t>
+            </a:r>
+          </a:p>
+          <a:p>
+            <a:endParaRPr lang="en-US" sz="4400" dirty="0"/>
           </a:p>
         </p:txBody>
       </p:sp>
